--- a/02_alkalom/Prezentacio/2_alkalom_prezentacio.pptx
+++ b/02_alkalom/Prezentacio/2_alkalom_prezentacio.pptx
@@ -289,10 +289,193 @@
           <a:lstStyle/>
           <a:p>
             <a:r>
-              <a:rPr lang="en-US" smtClean="0"/>
-              <a:t>~20 mp – Bárkányi Máté. Bemutatkozás: a csoport tagjai Bárkányi Máté, Horváth Máté és Kiss Barnabás; a leltározó és leltárkezelő alkalmazást fejlesztjük. Ma azt mutatjuk be, hogyan értelmeztük a problémát, mit tanultunk hasonló rendszerekből, és milyen irányban indulunk el.</a:t>
-            </a:r>
-            <a:endParaRPr lang="en-US" dirty="0"/>
+              <a:rPr lang="en-US" dirty="0"/>
+              <a:t>~20 </a:t>
+            </a:r>
+            <a:r>
+              <a:rPr lang="en-US" dirty="0" err="1"/>
+              <a:t>mp</a:t>
+            </a:r>
+            <a:r>
+              <a:rPr lang="en-US" dirty="0"/>
+              <a:t> – Bárkányi Máté. </a:t>
+            </a:r>
+            <a:r>
+              <a:rPr lang="en-US" dirty="0" err="1"/>
+              <a:t>Bemutatkozás</a:t>
+            </a:r>
+            <a:r>
+              <a:rPr lang="en-US" dirty="0"/>
+              <a:t>: a </a:t>
+            </a:r>
+            <a:r>
+              <a:rPr lang="en-US" dirty="0" err="1"/>
+              <a:t>csoport</a:t>
+            </a:r>
+            <a:r>
+              <a:rPr lang="en-US" dirty="0"/>
+              <a:t> </a:t>
+            </a:r>
+            <a:r>
+              <a:rPr lang="en-US" dirty="0" err="1"/>
+              <a:t>tagjai</a:t>
+            </a:r>
+            <a:r>
+              <a:rPr lang="en-US" dirty="0"/>
+              <a:t> Bárkányi Máté, Horváth Máté </a:t>
+            </a:r>
+            <a:r>
+              <a:rPr lang="en-US" dirty="0" err="1"/>
+              <a:t>és</a:t>
+            </a:r>
+            <a:r>
+              <a:rPr lang="en-US" dirty="0"/>
+              <a:t> Kiss Barnabás; a </a:t>
+            </a:r>
+            <a:r>
+              <a:rPr lang="en-US" dirty="0" err="1"/>
+              <a:t>leltározó</a:t>
+            </a:r>
+            <a:r>
+              <a:rPr lang="en-US" dirty="0"/>
+              <a:t> </a:t>
+            </a:r>
+            <a:r>
+              <a:rPr lang="en-US" dirty="0" err="1"/>
+              <a:t>és</a:t>
+            </a:r>
+            <a:r>
+              <a:rPr lang="en-US" dirty="0"/>
+              <a:t> </a:t>
+            </a:r>
+            <a:r>
+              <a:rPr lang="en-US" dirty="0" err="1"/>
+              <a:t>leltárkezelő</a:t>
+            </a:r>
+            <a:r>
+              <a:rPr lang="en-US" dirty="0"/>
+              <a:t> </a:t>
+            </a:r>
+            <a:r>
+              <a:rPr lang="en-US" dirty="0" err="1"/>
+              <a:t>alkalmazást</a:t>
+            </a:r>
+            <a:r>
+              <a:rPr lang="en-US" dirty="0"/>
+              <a:t> </a:t>
+            </a:r>
+            <a:r>
+              <a:rPr lang="en-US" dirty="0" err="1"/>
+              <a:t>fejlesztjük</a:t>
+            </a:r>
+            <a:r>
+              <a:rPr lang="en-US" dirty="0"/>
+              <a:t>. Ma </a:t>
+            </a:r>
+            <a:r>
+              <a:rPr lang="en-US" dirty="0" err="1"/>
+              <a:t>azt</a:t>
+            </a:r>
+            <a:r>
+              <a:rPr lang="en-US" dirty="0"/>
+              <a:t> </a:t>
+            </a:r>
+            <a:r>
+              <a:rPr lang="en-US" dirty="0" err="1"/>
+              <a:t>mutatjuk</a:t>
+            </a:r>
+            <a:r>
+              <a:rPr lang="en-US" dirty="0"/>
+              <a:t> be, </a:t>
+            </a:r>
+            <a:r>
+              <a:rPr lang="en-US" dirty="0" err="1"/>
+              <a:t>hogyan</a:t>
+            </a:r>
+            <a:r>
+              <a:rPr lang="en-US" dirty="0"/>
+              <a:t> </a:t>
+            </a:r>
+            <a:r>
+              <a:rPr lang="en-US" dirty="0" err="1"/>
+              <a:t>értelmeztük</a:t>
+            </a:r>
+            <a:r>
+              <a:rPr lang="en-US" dirty="0"/>
+              <a:t> a </a:t>
+            </a:r>
+            <a:r>
+              <a:rPr lang="en-US" dirty="0" err="1"/>
+              <a:t>problémát</a:t>
+            </a:r>
+            <a:r>
+              <a:rPr lang="en-US" dirty="0"/>
+              <a:t>, </a:t>
+            </a:r>
+            <a:r>
+              <a:rPr lang="en-US" dirty="0" err="1"/>
+              <a:t>mit</a:t>
+            </a:r>
+            <a:r>
+              <a:rPr lang="en-US" dirty="0"/>
+              <a:t> </a:t>
+            </a:r>
+            <a:r>
+              <a:rPr lang="en-US" dirty="0" err="1"/>
+              <a:t>tanultunk</a:t>
+            </a:r>
+            <a:r>
+              <a:rPr lang="en-US" dirty="0"/>
+              <a:t> </a:t>
+            </a:r>
+            <a:r>
+              <a:rPr lang="en-US" dirty="0" err="1"/>
+              <a:t>hasonló</a:t>
+            </a:r>
+            <a:r>
+              <a:rPr lang="en-US" dirty="0"/>
+              <a:t> </a:t>
+            </a:r>
+            <a:r>
+              <a:rPr lang="en-US" dirty="0" err="1"/>
+              <a:t>rendszerekből</a:t>
+            </a:r>
+            <a:r>
+              <a:rPr lang="en-US" dirty="0"/>
+              <a:t>, </a:t>
+            </a:r>
+            <a:r>
+              <a:rPr lang="en-US" dirty="0" err="1"/>
+              <a:t>és</a:t>
+            </a:r>
+            <a:r>
+              <a:rPr lang="en-US" dirty="0"/>
+              <a:t> </a:t>
+            </a:r>
+            <a:r>
+              <a:rPr lang="en-US" dirty="0" err="1"/>
+              <a:t>milyen</a:t>
+            </a:r>
+            <a:r>
+              <a:rPr lang="en-US" dirty="0"/>
+              <a:t> </a:t>
+            </a:r>
+            <a:r>
+              <a:rPr lang="en-US" dirty="0" err="1"/>
+              <a:t>irányban</a:t>
+            </a:r>
+            <a:r>
+              <a:rPr lang="en-US" dirty="0"/>
+              <a:t> </a:t>
+            </a:r>
+            <a:r>
+              <a:rPr lang="en-US" dirty="0" err="1"/>
+              <a:t>indulunk</a:t>
+            </a:r>
+            <a:r>
+              <a:rPr lang="en-US" dirty="0"/>
+              <a:t> el.</a:t>
+            </a:r>
           </a:p>
         </p:txBody>
       </p:sp>
@@ -377,10 +560,257 @@
           <a:lstStyle/>
           <a:p>
             <a:r>
-              <a:rPr lang="en-US" smtClean="0"/>
-              <a:t>~40 mp – Bárkányi Máté. A leltár célja: a nyilvántartásban lévő eszközök fizikailag is megvannak-e. Négy fő nehézség: több kód egy eszközön; mennyiséges tételek; más körzetben előkerülő eszközök; a hely és a korábbi eredmények hiánya. Ezért nem elég egy Excel-tábla. Átadás: Horváth Máté.</a:t>
-            </a:r>
-            <a:endParaRPr lang="en-US" dirty="0"/>
+              <a:rPr lang="en-US" dirty="0"/>
+              <a:t>~40 </a:t>
+            </a:r>
+            <a:r>
+              <a:rPr lang="en-US" dirty="0" err="1"/>
+              <a:t>mp</a:t>
+            </a:r>
+            <a:r>
+              <a:rPr lang="en-US" dirty="0"/>
+              <a:t> – Bárkányi Máté. A </a:t>
+            </a:r>
+            <a:r>
+              <a:rPr lang="en-US" dirty="0" err="1"/>
+              <a:t>leltár</a:t>
+            </a:r>
+            <a:r>
+              <a:rPr lang="en-US" dirty="0"/>
+              <a:t> </a:t>
+            </a:r>
+            <a:r>
+              <a:rPr lang="en-US" dirty="0" err="1"/>
+              <a:t>célja</a:t>
+            </a:r>
+            <a:r>
+              <a:rPr lang="en-US" dirty="0"/>
+              <a:t>: a </a:t>
+            </a:r>
+            <a:r>
+              <a:rPr lang="en-US" dirty="0" err="1"/>
+              <a:t>nyilvántartásban</a:t>
+            </a:r>
+            <a:r>
+              <a:rPr lang="en-US" dirty="0"/>
+              <a:t> </a:t>
+            </a:r>
+            <a:r>
+              <a:rPr lang="en-US" dirty="0" err="1"/>
+              <a:t>lévő</a:t>
+            </a:r>
+            <a:r>
+              <a:rPr lang="en-US" dirty="0"/>
+              <a:t> </a:t>
+            </a:r>
+            <a:r>
+              <a:rPr lang="en-US" dirty="0" err="1"/>
+              <a:t>eszközök</a:t>
+            </a:r>
+            <a:r>
+              <a:rPr lang="en-US" dirty="0"/>
+              <a:t> </a:t>
+            </a:r>
+            <a:r>
+              <a:rPr lang="en-US" dirty="0" err="1"/>
+              <a:t>fizikailag</a:t>
+            </a:r>
+            <a:r>
+              <a:rPr lang="en-US" dirty="0"/>
+              <a:t> is </a:t>
+            </a:r>
+            <a:r>
+              <a:rPr lang="en-US" dirty="0" err="1"/>
+              <a:t>megvannak</a:t>
+            </a:r>
+            <a:r>
+              <a:rPr lang="en-US" dirty="0"/>
+              <a:t>-e. </a:t>
+            </a:r>
+            <a:r>
+              <a:rPr lang="en-US" dirty="0" err="1"/>
+              <a:t>Négy</a:t>
+            </a:r>
+            <a:r>
+              <a:rPr lang="en-US" dirty="0"/>
+              <a:t> </a:t>
+            </a:r>
+            <a:r>
+              <a:rPr lang="en-US" dirty="0" err="1"/>
+              <a:t>fő</a:t>
+            </a:r>
+            <a:r>
+              <a:rPr lang="en-US" dirty="0"/>
+              <a:t> </a:t>
+            </a:r>
+            <a:r>
+              <a:rPr lang="en-US" dirty="0" err="1"/>
+              <a:t>nehézség</a:t>
+            </a:r>
+            <a:r>
+              <a:rPr lang="en-US" dirty="0"/>
+              <a:t>: </a:t>
+            </a:r>
+            <a:r>
+              <a:rPr lang="en-US" dirty="0" err="1"/>
+              <a:t>több</a:t>
+            </a:r>
+            <a:r>
+              <a:rPr lang="en-US" dirty="0"/>
+              <a:t> </a:t>
+            </a:r>
+            <a:r>
+              <a:rPr lang="en-US" dirty="0" err="1"/>
+              <a:t>kód</a:t>
+            </a:r>
+            <a:r>
+              <a:rPr lang="en-US" dirty="0"/>
+              <a:t> </a:t>
+            </a:r>
+            <a:r>
+              <a:rPr lang="en-US" dirty="0" err="1"/>
+              <a:t>egy</a:t>
+            </a:r>
+            <a:r>
+              <a:rPr lang="en-US" dirty="0"/>
+              <a:t> </a:t>
+            </a:r>
+            <a:r>
+              <a:rPr lang="en-US" dirty="0" err="1"/>
+              <a:t>eszközön</a:t>
+            </a:r>
+            <a:r>
+              <a:rPr lang="en-US" dirty="0"/>
+              <a:t>; </a:t>
+            </a:r>
+            <a:r>
+              <a:rPr lang="en-US" dirty="0" err="1"/>
+              <a:t>mennyiséges</a:t>
+            </a:r>
+            <a:r>
+              <a:rPr lang="en-US" dirty="0"/>
+              <a:t> </a:t>
+            </a:r>
+            <a:r>
+              <a:rPr lang="en-US" dirty="0" err="1"/>
+              <a:t>tételek</a:t>
+            </a:r>
+            <a:r>
+              <a:rPr lang="en-US" dirty="0"/>
+              <a:t>; </a:t>
+            </a:r>
+            <a:r>
+              <a:rPr lang="en-US" dirty="0" err="1"/>
+              <a:t>más</a:t>
+            </a:r>
+            <a:r>
+              <a:rPr lang="en-US" dirty="0"/>
+              <a:t> </a:t>
+            </a:r>
+            <a:r>
+              <a:rPr lang="en-US" dirty="0" err="1"/>
+              <a:t>körzetben</a:t>
+            </a:r>
+            <a:r>
+              <a:rPr lang="en-US" dirty="0"/>
+              <a:t> </a:t>
+            </a:r>
+            <a:r>
+              <a:rPr lang="en-US" dirty="0" err="1"/>
+              <a:t>előkerülő</a:t>
+            </a:r>
+            <a:r>
+              <a:rPr lang="en-US" dirty="0"/>
+              <a:t> </a:t>
+            </a:r>
+            <a:r>
+              <a:rPr lang="en-US" dirty="0" err="1"/>
+              <a:t>eszközök</a:t>
+            </a:r>
+            <a:r>
+              <a:rPr lang="en-US" dirty="0"/>
+              <a:t>; a </a:t>
+            </a:r>
+            <a:r>
+              <a:rPr lang="en-US" dirty="0" err="1"/>
+              <a:t>hely</a:t>
+            </a:r>
+            <a:r>
+              <a:rPr lang="en-US" dirty="0"/>
+              <a:t> </a:t>
+            </a:r>
+            <a:r>
+              <a:rPr lang="en-US" dirty="0" err="1"/>
+              <a:t>és</a:t>
+            </a:r>
+            <a:r>
+              <a:rPr lang="en-US" dirty="0"/>
+              <a:t> a </a:t>
+            </a:r>
+            <a:r>
+              <a:rPr lang="en-US" dirty="0" err="1"/>
+              <a:t>korábbi</a:t>
+            </a:r>
+            <a:r>
+              <a:rPr lang="en-US" dirty="0"/>
+              <a:t> </a:t>
+            </a:r>
+            <a:r>
+              <a:rPr lang="en-US" dirty="0" err="1"/>
+              <a:t>eredmények</a:t>
+            </a:r>
+            <a:r>
+              <a:rPr lang="en-US" dirty="0"/>
+              <a:t> </a:t>
+            </a:r>
+            <a:r>
+              <a:rPr lang="en-US" dirty="0" err="1"/>
+              <a:t>hiánya</a:t>
+            </a:r>
+            <a:r>
+              <a:rPr lang="en-US" dirty="0"/>
+              <a:t>. </a:t>
+            </a:r>
+            <a:r>
+              <a:rPr lang="en-US" dirty="0" err="1"/>
+              <a:t>Ezért</a:t>
+            </a:r>
+            <a:r>
+              <a:rPr lang="en-US" dirty="0"/>
+              <a:t> nem </a:t>
+            </a:r>
+            <a:r>
+              <a:rPr lang="en-US" dirty="0" err="1"/>
+              <a:t>elég</a:t>
+            </a:r>
+            <a:r>
+              <a:rPr lang="en-US" dirty="0"/>
+              <a:t> </a:t>
+            </a:r>
+            <a:r>
+              <a:rPr lang="en-US" dirty="0" err="1"/>
+              <a:t>egy</a:t>
+            </a:r>
+            <a:r>
+              <a:rPr lang="en-US" dirty="0"/>
+              <a:t> Excel-</a:t>
+            </a:r>
+            <a:r>
+              <a:rPr lang="en-US" dirty="0" err="1"/>
+              <a:t>tábla</a:t>
+            </a:r>
+            <a:r>
+              <a:rPr lang="en-US" dirty="0"/>
+              <a:t>. </a:t>
+            </a:r>
+            <a:r>
+              <a:rPr lang="en-US" dirty="0" err="1"/>
+              <a:t>Átadás</a:t>
+            </a:r>
+            <a:r>
+              <a:rPr lang="en-US" dirty="0"/>
+              <a:t>: Horváth Máté.</a:t>
+            </a:r>
           </a:p>
         </p:txBody>
       </p:sp>
@@ -465,10 +895,273 @@
           <a:lstStyle/>
           <a:p>
             <a:r>
-              <a:rPr lang="en-US" smtClean="0"/>
-              <a:t>~40 mp – Horváth Máté. Öt rendszert néztünk meg. Mindegyikből egy konkrét tanulságot hozunk: eseménynapló, módosítástörténet, elvárt vs. megszámolt mennyiség, időfüggő helyadat, gyors beolvasó felület. Egyik sem fedi le a teljes feladatot, és egyik sem asztali kliens – ez indokolja a saját rendszert.</a:t>
-            </a:r>
-            <a:endParaRPr lang="en-US" dirty="0"/>
+              <a:rPr lang="en-US" dirty="0"/>
+              <a:t>~40 </a:t>
+            </a:r>
+            <a:r>
+              <a:rPr lang="en-US" dirty="0" err="1"/>
+              <a:t>mp</a:t>
+            </a:r>
+            <a:r>
+              <a:rPr lang="en-US" dirty="0"/>
+              <a:t> – Horváth Máté. </a:t>
+            </a:r>
+            <a:r>
+              <a:rPr lang="en-US" dirty="0" err="1"/>
+              <a:t>Öt</a:t>
+            </a:r>
+            <a:r>
+              <a:rPr lang="en-US" dirty="0"/>
+              <a:t> </a:t>
+            </a:r>
+            <a:r>
+              <a:rPr lang="en-US" dirty="0" err="1"/>
+              <a:t>rendszert</a:t>
+            </a:r>
+            <a:r>
+              <a:rPr lang="en-US" dirty="0"/>
+              <a:t> </a:t>
+            </a:r>
+            <a:r>
+              <a:rPr lang="en-US" dirty="0" err="1"/>
+              <a:t>néztünk</a:t>
+            </a:r>
+            <a:r>
+              <a:rPr lang="en-US" dirty="0"/>
+              <a:t> meg. </a:t>
+            </a:r>
+            <a:r>
+              <a:rPr lang="en-US" dirty="0" err="1"/>
+              <a:t>Mindegyikből</a:t>
+            </a:r>
+            <a:r>
+              <a:rPr lang="en-US" dirty="0"/>
+              <a:t> </a:t>
+            </a:r>
+            <a:r>
+              <a:rPr lang="en-US" dirty="0" err="1"/>
+              <a:t>egy</a:t>
+            </a:r>
+            <a:r>
+              <a:rPr lang="en-US" dirty="0"/>
+              <a:t> </a:t>
+            </a:r>
+            <a:r>
+              <a:rPr lang="en-US" dirty="0" err="1"/>
+              <a:t>konkrét</a:t>
+            </a:r>
+            <a:r>
+              <a:rPr lang="en-US" dirty="0"/>
+              <a:t> </a:t>
+            </a:r>
+            <a:r>
+              <a:rPr lang="en-US" dirty="0" err="1"/>
+              <a:t>tanulságot</a:t>
+            </a:r>
+            <a:r>
+              <a:rPr lang="en-US" dirty="0"/>
+              <a:t> </a:t>
+            </a:r>
+            <a:r>
+              <a:rPr lang="en-US" dirty="0" err="1"/>
+              <a:t>hozunk</a:t>
+            </a:r>
+            <a:r>
+              <a:rPr lang="en-US" dirty="0"/>
+              <a:t>: </a:t>
+            </a:r>
+            <a:r>
+              <a:rPr lang="en-US" dirty="0" err="1"/>
+              <a:t>eseménynapló</a:t>
+            </a:r>
+            <a:r>
+              <a:rPr lang="en-US" dirty="0"/>
+              <a:t>, </a:t>
+            </a:r>
+            <a:r>
+              <a:rPr lang="en-US" dirty="0" err="1"/>
+              <a:t>módosítástörténet</a:t>
+            </a:r>
+            <a:r>
+              <a:rPr lang="en-US" dirty="0"/>
+              <a:t>, </a:t>
+            </a:r>
+            <a:r>
+              <a:rPr lang="en-US" dirty="0" err="1"/>
+              <a:t>elvárt</a:t>
+            </a:r>
+            <a:r>
+              <a:rPr lang="en-US" dirty="0"/>
+              <a:t> vs. </a:t>
+            </a:r>
+            <a:r>
+              <a:rPr lang="en-US" dirty="0" err="1"/>
+              <a:t>megszámolt</a:t>
+            </a:r>
+            <a:r>
+              <a:rPr lang="en-US" dirty="0"/>
+              <a:t> </a:t>
+            </a:r>
+            <a:r>
+              <a:rPr lang="en-US" dirty="0" err="1"/>
+              <a:t>mennyiség</a:t>
+            </a:r>
+            <a:r>
+              <a:rPr lang="en-US" dirty="0"/>
+              <a:t>, </a:t>
+            </a:r>
+            <a:r>
+              <a:rPr lang="en-US" dirty="0" err="1"/>
+              <a:t>időfüggő</a:t>
+            </a:r>
+            <a:r>
+              <a:rPr lang="en-US" dirty="0"/>
+              <a:t> </a:t>
+            </a:r>
+            <a:r>
+              <a:rPr lang="en-US" dirty="0" err="1"/>
+              <a:t>helyadat</a:t>
+            </a:r>
+            <a:r>
+              <a:rPr lang="en-US" dirty="0"/>
+              <a:t>, </a:t>
+            </a:r>
+            <a:r>
+              <a:rPr lang="en-US" dirty="0" err="1"/>
+              <a:t>gyors</a:t>
+            </a:r>
+            <a:r>
+              <a:rPr lang="en-US" dirty="0"/>
+              <a:t> </a:t>
+            </a:r>
+            <a:r>
+              <a:rPr lang="en-US" dirty="0" err="1"/>
+              <a:t>beolvasó</a:t>
+            </a:r>
+            <a:r>
+              <a:rPr lang="en-US" dirty="0"/>
+              <a:t> </a:t>
+            </a:r>
+            <a:r>
+              <a:rPr lang="en-US" dirty="0" err="1"/>
+              <a:t>felület</a:t>
+            </a:r>
+            <a:r>
+              <a:rPr lang="en-US" dirty="0"/>
+              <a:t>. </a:t>
+            </a:r>
+            <a:r>
+              <a:rPr lang="en-US" dirty="0" err="1"/>
+              <a:t>Egyik</a:t>
+            </a:r>
+            <a:r>
+              <a:rPr lang="en-US" dirty="0"/>
+              <a:t> </a:t>
+            </a:r>
+            <a:r>
+              <a:rPr lang="en-US" dirty="0" err="1"/>
+              <a:t>sem</a:t>
+            </a:r>
+            <a:r>
+              <a:rPr lang="en-US" dirty="0"/>
+              <a:t> </a:t>
+            </a:r>
+            <a:r>
+              <a:rPr lang="en-US" dirty="0" err="1"/>
+              <a:t>fedi</a:t>
+            </a:r>
+            <a:r>
+              <a:rPr lang="en-US" dirty="0"/>
+              <a:t> le a </a:t>
+            </a:r>
+            <a:r>
+              <a:rPr lang="en-US" dirty="0" err="1"/>
+              <a:t>teljes</a:t>
+            </a:r>
+            <a:r>
+              <a:rPr lang="en-US" dirty="0"/>
+              <a:t> </a:t>
+            </a:r>
+            <a:r>
+              <a:rPr lang="en-US" dirty="0" err="1"/>
+              <a:t>feladatot</a:t>
+            </a:r>
+            <a:r>
+              <a:rPr lang="en-US" dirty="0"/>
+              <a:t>, </a:t>
+            </a:r>
+            <a:r>
+              <a:rPr lang="en-US" dirty="0" err="1"/>
+              <a:t>és</a:t>
+            </a:r>
+            <a:r>
+              <a:rPr lang="en-US" dirty="0"/>
+              <a:t> </a:t>
+            </a:r>
+            <a:r>
+              <a:rPr lang="en-US" dirty="0" err="1"/>
+              <a:t>egyik</a:t>
+            </a:r>
+            <a:r>
+              <a:rPr lang="en-US" dirty="0"/>
+              <a:t> </a:t>
+            </a:r>
+            <a:r>
+              <a:rPr lang="en-US" dirty="0" err="1"/>
+              <a:t>sem</a:t>
+            </a:r>
+            <a:r>
+              <a:rPr lang="en-US" dirty="0"/>
+              <a:t> </a:t>
+            </a:r>
+            <a:r>
+              <a:rPr lang="en-US" dirty="0" err="1"/>
+              <a:t>asztali</a:t>
+            </a:r>
+            <a:r>
+              <a:rPr lang="en-US" dirty="0"/>
+              <a:t> </a:t>
+            </a:r>
+            <a:r>
+              <a:rPr lang="en-US" dirty="0" err="1"/>
+              <a:t>kliens</a:t>
+            </a:r>
+            <a:r>
+              <a:rPr lang="en-US" dirty="0"/>
+              <a:t> – </a:t>
+            </a:r>
+            <a:r>
+              <a:rPr lang="en-US" dirty="0" err="1"/>
+              <a:t>ez</a:t>
+            </a:r>
+            <a:r>
+              <a:rPr lang="en-US" dirty="0"/>
+              <a:t> </a:t>
+            </a:r>
+            <a:r>
+              <a:rPr lang="en-US" dirty="0" err="1"/>
+              <a:t>indokolja</a:t>
+            </a:r>
+            <a:r>
+              <a:rPr lang="en-US" dirty="0"/>
+              <a:t> a </a:t>
+            </a:r>
+            <a:r>
+              <a:rPr lang="en-US" dirty="0" err="1"/>
+              <a:t>saját</a:t>
+            </a:r>
+            <a:r>
+              <a:rPr lang="en-US" dirty="0"/>
+              <a:t> </a:t>
+            </a:r>
+            <a:r>
+              <a:rPr lang="en-US" dirty="0" err="1"/>
+              <a:t>rendszert</a:t>
+            </a:r>
+            <a:r>
+              <a:rPr lang="en-US" dirty="0"/>
+              <a:t>.</a:t>
+            </a:r>
           </a:p>
         </p:txBody>
       </p:sp>
@@ -553,10 +1246,217 @@
           <a:lstStyle/>
           <a:p>
             <a:r>
-              <a:rPr lang="en-US" smtClean="0"/>
-              <a:t>~40 mp – Horváth Máté. Négy szerepkört azonosítottunk a valós leltározási folyamat alapján; a felelős személy nem feltétlenül felhasználó. Jobb oldalon a leltár életciklusa: import, időszak nyitása pillanatképpel, helyiségenkénti beolvasás, javítás, összehasonlítás, lezárás és riport. Átadás: Kiss Barnabás.</a:t>
-            </a:r>
-            <a:endParaRPr lang="en-US" dirty="0"/>
+              <a:rPr lang="en-US" dirty="0"/>
+              <a:t>~40 </a:t>
+            </a:r>
+            <a:r>
+              <a:rPr lang="en-US" dirty="0" err="1"/>
+              <a:t>mp</a:t>
+            </a:r>
+            <a:r>
+              <a:rPr lang="en-US" dirty="0"/>
+              <a:t> – Horváth Máté. </a:t>
+            </a:r>
+            <a:r>
+              <a:rPr lang="en-US" dirty="0" err="1"/>
+              <a:t>Négy</a:t>
+            </a:r>
+            <a:r>
+              <a:rPr lang="en-US" dirty="0"/>
+              <a:t> </a:t>
+            </a:r>
+            <a:r>
+              <a:rPr lang="en-US" dirty="0" err="1"/>
+              <a:t>szerepkört</a:t>
+            </a:r>
+            <a:r>
+              <a:rPr lang="en-US" dirty="0"/>
+              <a:t> </a:t>
+            </a:r>
+            <a:r>
+              <a:rPr lang="en-US" dirty="0" err="1"/>
+              <a:t>azonosítottunk</a:t>
+            </a:r>
+            <a:r>
+              <a:rPr lang="en-US" dirty="0"/>
+              <a:t> a </a:t>
+            </a:r>
+            <a:r>
+              <a:rPr lang="en-US" dirty="0" err="1"/>
+              <a:t>valós</a:t>
+            </a:r>
+            <a:r>
+              <a:rPr lang="en-US" dirty="0"/>
+              <a:t> </a:t>
+            </a:r>
+            <a:r>
+              <a:rPr lang="en-US" dirty="0" err="1"/>
+              <a:t>leltározási</a:t>
+            </a:r>
+            <a:r>
+              <a:rPr lang="en-US" dirty="0"/>
+              <a:t> </a:t>
+            </a:r>
+            <a:r>
+              <a:rPr lang="en-US" dirty="0" err="1"/>
+              <a:t>folyamat</a:t>
+            </a:r>
+            <a:r>
+              <a:rPr lang="en-US" dirty="0"/>
+              <a:t> </a:t>
+            </a:r>
+            <a:r>
+              <a:rPr lang="en-US" dirty="0" err="1"/>
+              <a:t>alapján</a:t>
+            </a:r>
+            <a:r>
+              <a:rPr lang="en-US" dirty="0"/>
+              <a:t>; a </a:t>
+            </a:r>
+            <a:r>
+              <a:rPr lang="en-US" dirty="0" err="1"/>
+              <a:t>felelős</a:t>
+            </a:r>
+            <a:r>
+              <a:rPr lang="en-US" dirty="0"/>
+              <a:t> </a:t>
+            </a:r>
+            <a:r>
+              <a:rPr lang="en-US" dirty="0" err="1"/>
+              <a:t>személy</a:t>
+            </a:r>
+            <a:r>
+              <a:rPr lang="en-US" dirty="0"/>
+              <a:t> nem </a:t>
+            </a:r>
+            <a:r>
+              <a:rPr lang="en-US" dirty="0" err="1"/>
+              <a:t>feltétlenül</a:t>
+            </a:r>
+            <a:r>
+              <a:rPr lang="en-US" dirty="0"/>
+              <a:t> </a:t>
+            </a:r>
+            <a:r>
+              <a:rPr lang="en-US" dirty="0" err="1"/>
+              <a:t>felhasználó</a:t>
+            </a:r>
+            <a:r>
+              <a:rPr lang="en-US" dirty="0"/>
+              <a:t>. Jobb </a:t>
+            </a:r>
+            <a:r>
+              <a:rPr lang="en-US" dirty="0" err="1"/>
+              <a:t>oldalon</a:t>
+            </a:r>
+            <a:r>
+              <a:rPr lang="en-US" dirty="0"/>
+              <a:t> a </a:t>
+            </a:r>
+            <a:r>
+              <a:rPr lang="en-US" dirty="0" err="1"/>
+              <a:t>leltár</a:t>
+            </a:r>
+            <a:r>
+              <a:rPr lang="en-US" dirty="0"/>
+              <a:t> </a:t>
+            </a:r>
+            <a:r>
+              <a:rPr lang="en-US" dirty="0" err="1"/>
+              <a:t>életciklusa</a:t>
+            </a:r>
+            <a:r>
+              <a:rPr lang="en-US" dirty="0"/>
+              <a:t>: import, </a:t>
+            </a:r>
+            <a:r>
+              <a:rPr lang="en-US" dirty="0" err="1"/>
+              <a:t>időszak</a:t>
+            </a:r>
+            <a:r>
+              <a:rPr lang="en-US" dirty="0"/>
+              <a:t> </a:t>
+            </a:r>
+            <a:r>
+              <a:rPr lang="en-US" dirty="0" err="1"/>
+              <a:t>nyitása</a:t>
+            </a:r>
+            <a:r>
+              <a:rPr lang="en-US" dirty="0"/>
+              <a:t> </a:t>
+            </a:r>
+            <a:r>
+              <a:rPr lang="en-US" dirty="0" err="1"/>
+              <a:t>pillanatképpel</a:t>
+            </a:r>
+            <a:r>
+              <a:rPr lang="en-US" dirty="0"/>
+              <a:t>, </a:t>
+            </a:r>
+            <a:r>
+              <a:rPr lang="en-US" dirty="0" err="1"/>
+              <a:t>helyiségenkénti</a:t>
+            </a:r>
+            <a:r>
+              <a:rPr lang="en-US" dirty="0"/>
+              <a:t> </a:t>
+            </a:r>
+            <a:r>
+              <a:rPr lang="en-US" dirty="0" err="1"/>
+              <a:t>beolvasás</a:t>
+            </a:r>
+            <a:r>
+              <a:rPr lang="en-US" dirty="0"/>
+              <a:t>, </a:t>
+            </a:r>
+            <a:r>
+              <a:rPr lang="en-US" dirty="0" err="1"/>
+              <a:t>javítás</a:t>
+            </a:r>
+            <a:r>
+              <a:rPr lang="en-US" dirty="0"/>
+              <a:t>, </a:t>
+            </a:r>
+            <a:r>
+              <a:rPr lang="en-US" dirty="0" err="1"/>
+              <a:t>összehasonlítás</a:t>
+            </a:r>
+            <a:r>
+              <a:rPr lang="en-US" dirty="0"/>
+              <a:t>, </a:t>
+            </a:r>
+            <a:r>
+              <a:rPr lang="en-US" dirty="0" err="1"/>
+              <a:t>lezárás</a:t>
+            </a:r>
+            <a:r>
+              <a:rPr lang="en-US" dirty="0"/>
+              <a:t> </a:t>
+            </a:r>
+            <a:r>
+              <a:rPr lang="en-US" dirty="0" err="1"/>
+              <a:t>és</a:t>
+            </a:r>
+            <a:r>
+              <a:rPr lang="en-US" dirty="0"/>
+              <a:t> </a:t>
+            </a:r>
+            <a:r>
+              <a:rPr lang="en-US" dirty="0" err="1"/>
+              <a:t>riport</a:t>
+            </a:r>
+            <a:r>
+              <a:rPr lang="en-US" dirty="0"/>
+              <a:t>. </a:t>
+            </a:r>
+            <a:r>
+              <a:rPr lang="en-US" dirty="0" err="1"/>
+              <a:t>Átadás</a:t>
+            </a:r>
+            <a:r>
+              <a:rPr lang="en-US" dirty="0"/>
+              <a:t>: Kiss Barnabás.</a:t>
+            </a:r>
           </a:p>
         </p:txBody>
       </p:sp>
@@ -641,8 +1541,16 @@
           <a:lstStyle/>
           <a:p>
             <a:r>
-              <a:rPr lang="hu-HU" smtClean="0"/>
-              <a:t>~45 mp – Kiss Barnabás. Ez a rendszer szíve. A vonalkódolvasó billentyűzetként ír a mezőbe; olvasó nélkül Ctrl+V-vel vagy demó móddal is működik. A szerver minősíti a beolvasást: megtalálva, más körzet, ismételt, többlet, ismeretlen – mindegyik rögzül, egyiket sem dobjuk el, javítani csak sztornóval lehet. Ezek a mi feltételezéseink, a dokumentációban indokoljuk őket.</a:t>
+              <a:rPr lang="hu-HU" dirty="0"/>
+              <a:t>~45 mp – Kiss Barnabás. Ez a rendszer szíve. A vonalkódolvasó billentyűzetként ír a mezőbe; olvasó nélkül </a:t>
+            </a:r>
+            <a:r>
+              <a:rPr lang="hu-HU" dirty="0" err="1"/>
+              <a:t>Ctrl+V-vel</a:t>
+            </a:r>
+            <a:r>
+              <a:rPr lang="hu-HU" dirty="0"/>
+              <a:t> vagy demó móddal is működik. A szerver minősíti a beolvasást: megtalálva, más körzet, ismételt, többlet, ismeretlen – mindegyik rögzül, egyiket sem dobjuk el, javítani csak sztornóval lehet. Ezek a mi feltételezéseink, a dokumentációban indokoljuk őket.</a:t>
             </a:r>
             <a:endParaRPr lang="en-US" dirty="0"/>
           </a:p>
@@ -729,10 +1637,193 @@
           <a:lstStyle/>
           <a:p>
             <a:r>
-              <a:rPr lang="en-US" smtClean="0"/>
-              <a:t>~35 mp – Kiss Barnabás. A funkciókat MoSCoW szerint priorizáltuk. Bal oldalon a kötelező kör, középen amit egy valós rendszerben elvárnánk, jobbra a kiegészítő funkció jelöltek – ezekből 1–2-t a 3. alkalmon javaslunk jóváhagyásra. Átadás: Horváth Máté.</a:t>
-            </a:r>
-            <a:endParaRPr lang="en-US" dirty="0"/>
+              <a:rPr lang="en-US" dirty="0"/>
+              <a:t>~35 </a:t>
+            </a:r>
+            <a:r>
+              <a:rPr lang="en-US" dirty="0" err="1"/>
+              <a:t>mp</a:t>
+            </a:r>
+            <a:r>
+              <a:rPr lang="en-US" dirty="0"/>
+              <a:t> – Kiss Barnabás. A </a:t>
+            </a:r>
+            <a:r>
+              <a:rPr lang="en-US" dirty="0" err="1"/>
+              <a:t>funkciókat</a:t>
+            </a:r>
+            <a:r>
+              <a:rPr lang="en-US" dirty="0"/>
+              <a:t> </a:t>
+            </a:r>
+            <a:r>
+              <a:rPr lang="en-US" dirty="0" err="1"/>
+              <a:t>MoSCoW</a:t>
+            </a:r>
+            <a:r>
+              <a:rPr lang="en-US" dirty="0"/>
+              <a:t> </a:t>
+            </a:r>
+            <a:r>
+              <a:rPr lang="en-US" dirty="0" err="1"/>
+              <a:t>szerint</a:t>
+            </a:r>
+            <a:r>
+              <a:rPr lang="en-US" dirty="0"/>
+              <a:t> </a:t>
+            </a:r>
+            <a:r>
+              <a:rPr lang="en-US" dirty="0" err="1"/>
+              <a:t>priorizáltuk</a:t>
+            </a:r>
+            <a:r>
+              <a:rPr lang="en-US" dirty="0"/>
+              <a:t>. Bal </a:t>
+            </a:r>
+            <a:r>
+              <a:rPr lang="en-US" dirty="0" err="1"/>
+              <a:t>oldalon</a:t>
+            </a:r>
+            <a:r>
+              <a:rPr lang="en-US" dirty="0"/>
+              <a:t> a </a:t>
+            </a:r>
+            <a:r>
+              <a:rPr lang="en-US" dirty="0" err="1"/>
+              <a:t>kötelező</a:t>
+            </a:r>
+            <a:r>
+              <a:rPr lang="en-US" dirty="0"/>
+              <a:t> </a:t>
+            </a:r>
+            <a:r>
+              <a:rPr lang="en-US" dirty="0" err="1"/>
+              <a:t>kör</a:t>
+            </a:r>
+            <a:r>
+              <a:rPr lang="en-US" dirty="0"/>
+              <a:t>, </a:t>
+            </a:r>
+            <a:r>
+              <a:rPr lang="en-US" dirty="0" err="1"/>
+              <a:t>középen</a:t>
+            </a:r>
+            <a:r>
+              <a:rPr lang="en-US" dirty="0"/>
+              <a:t> </a:t>
+            </a:r>
+            <a:r>
+              <a:rPr lang="en-US" dirty="0" err="1"/>
+              <a:t>amit</a:t>
+            </a:r>
+            <a:r>
+              <a:rPr lang="en-US" dirty="0"/>
+              <a:t> </a:t>
+            </a:r>
+            <a:r>
+              <a:rPr lang="en-US" dirty="0" err="1"/>
+              <a:t>egy</a:t>
+            </a:r>
+            <a:r>
+              <a:rPr lang="en-US" dirty="0"/>
+              <a:t> </a:t>
+            </a:r>
+            <a:r>
+              <a:rPr lang="en-US" dirty="0" err="1"/>
+              <a:t>valós</a:t>
+            </a:r>
+            <a:r>
+              <a:rPr lang="en-US" dirty="0"/>
+              <a:t> </a:t>
+            </a:r>
+            <a:r>
+              <a:rPr lang="en-US" dirty="0" err="1"/>
+              <a:t>rendszerben</a:t>
+            </a:r>
+            <a:r>
+              <a:rPr lang="en-US" dirty="0"/>
+              <a:t> </a:t>
+            </a:r>
+            <a:r>
+              <a:rPr lang="en-US" dirty="0" err="1"/>
+              <a:t>elvárnánk</a:t>
+            </a:r>
+            <a:r>
+              <a:rPr lang="en-US" dirty="0"/>
+              <a:t>, </a:t>
+            </a:r>
+            <a:r>
+              <a:rPr lang="en-US" dirty="0" err="1"/>
+              <a:t>jobbra</a:t>
+            </a:r>
+            <a:r>
+              <a:rPr lang="en-US" dirty="0"/>
+              <a:t> a </a:t>
+            </a:r>
+            <a:r>
+              <a:rPr lang="en-US" dirty="0" err="1"/>
+              <a:t>kiegészítő</a:t>
+            </a:r>
+            <a:r>
+              <a:rPr lang="en-US" dirty="0"/>
+              <a:t> </a:t>
+            </a:r>
+            <a:r>
+              <a:rPr lang="en-US" dirty="0" err="1"/>
+              <a:t>funkció</a:t>
+            </a:r>
+            <a:r>
+              <a:rPr lang="en-US" dirty="0"/>
+              <a:t> </a:t>
+            </a:r>
+            <a:r>
+              <a:rPr lang="en-US" dirty="0" err="1"/>
+              <a:t>jelöltek</a:t>
+            </a:r>
+            <a:r>
+              <a:rPr lang="en-US" dirty="0"/>
+              <a:t> – </a:t>
+            </a:r>
+            <a:r>
+              <a:rPr lang="en-US" dirty="0" err="1"/>
+              <a:t>ezekből</a:t>
+            </a:r>
+            <a:r>
+              <a:rPr lang="en-US" dirty="0"/>
+              <a:t> 1–2-t a 3. </a:t>
+            </a:r>
+            <a:r>
+              <a:rPr lang="en-US" dirty="0" err="1"/>
+              <a:t>alkalmon</a:t>
+            </a:r>
+            <a:r>
+              <a:rPr lang="en-US" dirty="0"/>
+              <a:t> </a:t>
+            </a:r>
+            <a:r>
+              <a:rPr lang="en-US" dirty="0" err="1"/>
+              <a:t>javaslunk</a:t>
+            </a:r>
+            <a:r>
+              <a:rPr lang="en-US" dirty="0"/>
+              <a:t> </a:t>
+            </a:r>
+            <a:r>
+              <a:rPr lang="en-US" dirty="0" err="1"/>
+              <a:t>jóváhagyásra</a:t>
+            </a:r>
+            <a:r>
+              <a:rPr lang="en-US" dirty="0"/>
+              <a:t>. </a:t>
+            </a:r>
+            <a:r>
+              <a:rPr lang="en-US" dirty="0" err="1"/>
+              <a:t>Átadás</a:t>
+            </a:r>
+            <a:r>
+              <a:rPr lang="en-US" dirty="0"/>
+              <a:t>: Horváth Máté.</a:t>
+            </a:r>
           </a:p>
         </p:txBody>
       </p:sp>
@@ -817,10 +1908,457 @@
           <a:lstStyle/>
           <a:p>
             <a:r>
-              <a:rPr lang="en-US" smtClean="0"/>
-              <a:t>~45 mp – Horváth Máté (architektúra), majd Kiss Barnabás (adatmodell). Horváth Máté: vékony kliens, okos szerver – minden üzleti szabály az ASP.NET Core szerveren fut, a WPF kliens megjelenít és a szerver API-ját hívja. WPF és ASP.NET Core mellett döntöttünk: közös C# nyelv és .NET platform kliensen és szerveren. Az adatbázist és a kommunikációs protokollt a 3. alkalomig választjuk ki. Kiss Barnabás: az adatmodell négy területre bomlik; a lényeg, hogy az elvárt állomány és a leltáreredmények külön vannak, a hely és a felelős pedig érvényességi időszakkal tárolódik.</a:t>
-            </a:r>
-            <a:endParaRPr lang="en-US" dirty="0"/>
+              <a:rPr lang="en-US" dirty="0"/>
+              <a:t>~45 </a:t>
+            </a:r>
+            <a:r>
+              <a:rPr lang="en-US" dirty="0" err="1"/>
+              <a:t>mp</a:t>
+            </a:r>
+            <a:r>
+              <a:rPr lang="en-US" dirty="0"/>
+              <a:t> – Horváth Máté (</a:t>
+            </a:r>
+            <a:r>
+              <a:rPr lang="en-US" dirty="0" err="1"/>
+              <a:t>architektúra</a:t>
+            </a:r>
+            <a:r>
+              <a:rPr lang="en-US" dirty="0"/>
+              <a:t>), </a:t>
+            </a:r>
+            <a:r>
+              <a:rPr lang="en-US" dirty="0" err="1"/>
+              <a:t>majd</a:t>
+            </a:r>
+            <a:r>
+              <a:rPr lang="en-US" dirty="0"/>
+              <a:t> Kiss Barnabás (</a:t>
+            </a:r>
+            <a:r>
+              <a:rPr lang="en-US" dirty="0" err="1"/>
+              <a:t>adatmodell</a:t>
+            </a:r>
+            <a:r>
+              <a:rPr lang="en-US" dirty="0"/>
+              <a:t>). Horváth Máté: </a:t>
+            </a:r>
+            <a:r>
+              <a:rPr lang="en-US" dirty="0" err="1"/>
+              <a:t>vékony</a:t>
+            </a:r>
+            <a:r>
+              <a:rPr lang="en-US" dirty="0"/>
+              <a:t> </a:t>
+            </a:r>
+            <a:r>
+              <a:rPr lang="en-US" dirty="0" err="1"/>
+              <a:t>kliens</a:t>
+            </a:r>
+            <a:r>
+              <a:rPr lang="en-US" dirty="0"/>
+              <a:t>, </a:t>
+            </a:r>
+            <a:r>
+              <a:rPr lang="en-US" dirty="0" err="1"/>
+              <a:t>okos</a:t>
+            </a:r>
+            <a:r>
+              <a:rPr lang="en-US" dirty="0"/>
+              <a:t> </a:t>
+            </a:r>
+            <a:r>
+              <a:rPr lang="en-US" dirty="0" err="1"/>
+              <a:t>szerver</a:t>
+            </a:r>
+            <a:r>
+              <a:rPr lang="en-US" dirty="0"/>
+              <a:t> – </a:t>
+            </a:r>
+            <a:r>
+              <a:rPr lang="en-US" dirty="0" err="1"/>
+              <a:t>minden</a:t>
+            </a:r>
+            <a:r>
+              <a:rPr lang="en-US" dirty="0"/>
+              <a:t> </a:t>
+            </a:r>
+            <a:r>
+              <a:rPr lang="en-US" dirty="0" err="1"/>
+              <a:t>üzleti</a:t>
+            </a:r>
+            <a:r>
+              <a:rPr lang="en-US" dirty="0"/>
+              <a:t> </a:t>
+            </a:r>
+            <a:r>
+              <a:rPr lang="en-US" dirty="0" err="1"/>
+              <a:t>szabály</a:t>
+            </a:r>
+            <a:r>
+              <a:rPr lang="en-US" dirty="0"/>
+              <a:t> </a:t>
+            </a:r>
+            <a:r>
+              <a:rPr lang="en-US" dirty="0" err="1"/>
+              <a:t>az</a:t>
+            </a:r>
+            <a:r>
+              <a:rPr lang="en-US" dirty="0"/>
+              <a:t> ASP.NET Core </a:t>
+            </a:r>
+            <a:r>
+              <a:rPr lang="en-US" dirty="0" err="1"/>
+              <a:t>szerveren</a:t>
+            </a:r>
+            <a:r>
+              <a:rPr lang="en-US" dirty="0"/>
+              <a:t> </a:t>
+            </a:r>
+            <a:r>
+              <a:rPr lang="en-US" dirty="0" err="1"/>
+              <a:t>fut</a:t>
+            </a:r>
+            <a:r>
+              <a:rPr lang="en-US" dirty="0"/>
+              <a:t>, a WPF </a:t>
+            </a:r>
+            <a:r>
+              <a:rPr lang="en-US" dirty="0" err="1"/>
+              <a:t>kliens</a:t>
+            </a:r>
+            <a:r>
+              <a:rPr lang="en-US" dirty="0"/>
+              <a:t> </a:t>
+            </a:r>
+            <a:r>
+              <a:rPr lang="en-US" dirty="0" err="1"/>
+              <a:t>megjelenít</a:t>
+            </a:r>
+            <a:r>
+              <a:rPr lang="en-US" dirty="0"/>
+              <a:t> </a:t>
+            </a:r>
+            <a:r>
+              <a:rPr lang="en-US" dirty="0" err="1"/>
+              <a:t>és</a:t>
+            </a:r>
+            <a:r>
+              <a:rPr lang="en-US" dirty="0"/>
+              <a:t> a </a:t>
+            </a:r>
+            <a:r>
+              <a:rPr lang="en-US" dirty="0" err="1"/>
+              <a:t>szerver</a:t>
+            </a:r>
+            <a:r>
+              <a:rPr lang="en-US" dirty="0"/>
+              <a:t> API-</a:t>
+            </a:r>
+            <a:r>
+              <a:rPr lang="en-US" dirty="0" err="1"/>
+              <a:t>ját</a:t>
+            </a:r>
+            <a:r>
+              <a:rPr lang="en-US" dirty="0"/>
+              <a:t> </a:t>
+            </a:r>
+            <a:r>
+              <a:rPr lang="en-US" dirty="0" err="1"/>
+              <a:t>hívja</a:t>
+            </a:r>
+            <a:r>
+              <a:rPr lang="en-US" dirty="0"/>
+              <a:t>. WPF </a:t>
+            </a:r>
+            <a:r>
+              <a:rPr lang="en-US" dirty="0" err="1"/>
+              <a:t>és</a:t>
+            </a:r>
+            <a:r>
+              <a:rPr lang="en-US" dirty="0"/>
+              <a:t> ASP.NET Core </a:t>
+            </a:r>
+            <a:r>
+              <a:rPr lang="en-US" dirty="0" err="1"/>
+              <a:t>mellett</a:t>
+            </a:r>
+            <a:r>
+              <a:rPr lang="en-US" dirty="0"/>
+              <a:t> </a:t>
+            </a:r>
+            <a:r>
+              <a:rPr lang="en-US" dirty="0" err="1"/>
+              <a:t>döntöttünk</a:t>
+            </a:r>
+            <a:r>
+              <a:rPr lang="en-US" dirty="0"/>
+              <a:t>: </a:t>
+            </a:r>
+            <a:r>
+              <a:rPr lang="en-US" dirty="0" err="1"/>
+              <a:t>közös</a:t>
+            </a:r>
+            <a:r>
+              <a:rPr lang="en-US" dirty="0"/>
+              <a:t> C# </a:t>
+            </a:r>
+            <a:r>
+              <a:rPr lang="en-US" dirty="0" err="1"/>
+              <a:t>nyelv</a:t>
+            </a:r>
+            <a:r>
+              <a:rPr lang="en-US" dirty="0"/>
+              <a:t> </a:t>
+            </a:r>
+            <a:r>
+              <a:rPr lang="en-US" dirty="0" err="1"/>
+              <a:t>és</a:t>
+            </a:r>
+            <a:r>
+              <a:rPr lang="en-US" dirty="0"/>
+              <a:t> .NET platform </a:t>
+            </a:r>
+            <a:r>
+              <a:rPr lang="en-US" dirty="0" err="1"/>
+              <a:t>kliensen</a:t>
+            </a:r>
+            <a:r>
+              <a:rPr lang="en-US" dirty="0"/>
+              <a:t> </a:t>
+            </a:r>
+            <a:r>
+              <a:rPr lang="en-US" dirty="0" err="1"/>
+              <a:t>és</a:t>
+            </a:r>
+            <a:r>
+              <a:rPr lang="en-US" dirty="0"/>
+              <a:t> </a:t>
+            </a:r>
+            <a:r>
+              <a:rPr lang="en-US" dirty="0" err="1"/>
+              <a:t>szerveren</a:t>
+            </a:r>
+            <a:r>
+              <a:rPr lang="en-US" dirty="0"/>
+              <a:t>. Az </a:t>
+            </a:r>
+            <a:r>
+              <a:rPr lang="en-US" dirty="0" err="1"/>
+              <a:t>adatbázist</a:t>
+            </a:r>
+            <a:r>
+              <a:rPr lang="en-US" dirty="0"/>
+              <a:t> </a:t>
+            </a:r>
+            <a:r>
+              <a:rPr lang="en-US" dirty="0" err="1"/>
+              <a:t>és</a:t>
+            </a:r>
+            <a:r>
+              <a:rPr lang="en-US" dirty="0"/>
+              <a:t> a </a:t>
+            </a:r>
+            <a:r>
+              <a:rPr lang="en-US" dirty="0" err="1"/>
+              <a:t>kommunikációs</a:t>
+            </a:r>
+            <a:r>
+              <a:rPr lang="en-US" dirty="0"/>
+              <a:t> </a:t>
+            </a:r>
+            <a:r>
+              <a:rPr lang="en-US" dirty="0" err="1"/>
+              <a:t>protokollt</a:t>
+            </a:r>
+            <a:r>
+              <a:rPr lang="en-US" dirty="0"/>
+              <a:t> a 3. </a:t>
+            </a:r>
+            <a:r>
+              <a:rPr lang="en-US" dirty="0" err="1"/>
+              <a:t>alkalomig</a:t>
+            </a:r>
+            <a:r>
+              <a:rPr lang="en-US" dirty="0"/>
+              <a:t> </a:t>
+            </a:r>
+            <a:r>
+              <a:rPr lang="en-US" dirty="0" err="1"/>
+              <a:t>választjuk</a:t>
+            </a:r>
+            <a:r>
+              <a:rPr lang="en-US" dirty="0"/>
+              <a:t> ki. Kiss Barnabás: </a:t>
+            </a:r>
+            <a:r>
+              <a:rPr lang="en-US" dirty="0" err="1"/>
+              <a:t>az</a:t>
+            </a:r>
+            <a:r>
+              <a:rPr lang="en-US" dirty="0"/>
+              <a:t> </a:t>
+            </a:r>
+            <a:r>
+              <a:rPr lang="en-US" dirty="0" err="1"/>
+              <a:t>adatmodell</a:t>
+            </a:r>
+            <a:r>
+              <a:rPr lang="en-US" dirty="0"/>
+              <a:t> </a:t>
+            </a:r>
+            <a:r>
+              <a:rPr lang="en-US" dirty="0" err="1"/>
+              <a:t>négy</a:t>
+            </a:r>
+            <a:r>
+              <a:rPr lang="en-US" dirty="0"/>
+              <a:t> </a:t>
+            </a:r>
+            <a:r>
+              <a:rPr lang="en-US" dirty="0" err="1"/>
+              <a:t>területre</a:t>
+            </a:r>
+            <a:r>
+              <a:rPr lang="en-US" dirty="0"/>
+              <a:t> </a:t>
+            </a:r>
+            <a:r>
+              <a:rPr lang="en-US" dirty="0" err="1"/>
+              <a:t>bomlik</a:t>
+            </a:r>
+            <a:r>
+              <a:rPr lang="en-US" dirty="0"/>
+              <a:t>; a </a:t>
+            </a:r>
+            <a:r>
+              <a:rPr lang="en-US" dirty="0" err="1"/>
+              <a:t>lényeg</a:t>
+            </a:r>
+            <a:r>
+              <a:rPr lang="en-US" dirty="0"/>
+              <a:t>, </a:t>
+            </a:r>
+            <a:r>
+              <a:rPr lang="en-US" dirty="0" err="1"/>
+              <a:t>hogy</a:t>
+            </a:r>
+            <a:r>
+              <a:rPr lang="en-US" dirty="0"/>
+              <a:t> </a:t>
+            </a:r>
+            <a:r>
+              <a:rPr lang="en-US" dirty="0" err="1"/>
+              <a:t>az</a:t>
+            </a:r>
+            <a:r>
+              <a:rPr lang="en-US" dirty="0"/>
+              <a:t> </a:t>
+            </a:r>
+            <a:r>
+              <a:rPr lang="en-US" dirty="0" err="1"/>
+              <a:t>elvárt</a:t>
+            </a:r>
+            <a:r>
+              <a:rPr lang="en-US" dirty="0"/>
+              <a:t> </a:t>
+            </a:r>
+            <a:r>
+              <a:rPr lang="en-US" dirty="0" err="1"/>
+              <a:t>állomány</a:t>
+            </a:r>
+            <a:r>
+              <a:rPr lang="en-US" dirty="0"/>
+              <a:t> </a:t>
+            </a:r>
+            <a:r>
+              <a:rPr lang="en-US" dirty="0" err="1"/>
+              <a:t>és</a:t>
+            </a:r>
+            <a:r>
+              <a:rPr lang="en-US" dirty="0"/>
+              <a:t> a </a:t>
+            </a:r>
+            <a:r>
+              <a:rPr lang="en-US" dirty="0" err="1"/>
+              <a:t>leltáreredmények</a:t>
+            </a:r>
+            <a:r>
+              <a:rPr lang="en-US" dirty="0"/>
+              <a:t> </a:t>
+            </a:r>
+            <a:r>
+              <a:rPr lang="en-US" dirty="0" err="1"/>
+              <a:t>külön</a:t>
+            </a:r>
+            <a:r>
+              <a:rPr lang="en-US" dirty="0"/>
+              <a:t> </a:t>
+            </a:r>
+            <a:r>
+              <a:rPr lang="en-US" dirty="0" err="1"/>
+              <a:t>vannak</a:t>
+            </a:r>
+            <a:r>
+              <a:rPr lang="en-US" dirty="0"/>
+              <a:t>, a </a:t>
+            </a:r>
+            <a:r>
+              <a:rPr lang="en-US" dirty="0" err="1"/>
+              <a:t>hely</a:t>
+            </a:r>
+            <a:r>
+              <a:rPr lang="en-US" dirty="0"/>
+              <a:t> </a:t>
+            </a:r>
+            <a:r>
+              <a:rPr lang="en-US" dirty="0" err="1"/>
+              <a:t>és</a:t>
+            </a:r>
+            <a:r>
+              <a:rPr lang="en-US" dirty="0"/>
+              <a:t> a </a:t>
+            </a:r>
+            <a:r>
+              <a:rPr lang="en-US" dirty="0" err="1"/>
+              <a:t>felelős</a:t>
+            </a:r>
+            <a:r>
+              <a:rPr lang="en-US" dirty="0"/>
+              <a:t> </a:t>
+            </a:r>
+            <a:r>
+              <a:rPr lang="en-US" dirty="0" err="1"/>
+              <a:t>pedig</a:t>
+            </a:r>
+            <a:r>
+              <a:rPr lang="en-US" dirty="0"/>
+              <a:t> </a:t>
+            </a:r>
+            <a:r>
+              <a:rPr lang="en-US" dirty="0" err="1"/>
+              <a:t>érvényességi</a:t>
+            </a:r>
+            <a:r>
+              <a:rPr lang="en-US" dirty="0"/>
+              <a:t> </a:t>
+            </a:r>
+            <a:r>
+              <a:rPr lang="en-US" dirty="0" err="1"/>
+              <a:t>időszakkal</a:t>
+            </a:r>
+            <a:r>
+              <a:rPr lang="en-US" dirty="0"/>
+              <a:t> </a:t>
+            </a:r>
+            <a:r>
+              <a:rPr lang="en-US" dirty="0" err="1"/>
+              <a:t>tárolódik</a:t>
+            </a:r>
+            <a:r>
+              <a:rPr lang="en-US" dirty="0"/>
+              <a:t>.</a:t>
+            </a:r>
           </a:p>
         </p:txBody>
       </p:sp>
@@ -905,10 +2443,481 @@
           <a:lstStyle/>
           <a:p>
             <a:r>
-              <a:rPr lang="en-US" smtClean="0"/>
-              <a:t>~35 mp – mindhárman, egy-egy mondatban a saját területükről. Bárkányi Máté: kliens és felhasználói élmény – GUI, leltározó képernyő, demó mód. Horváth Máté: szerver és üzleti logika – architektúra, API, leltárlogika. Kiss Barnabás: adat és minőség – adatmodell, import/export, tesztelés. Közösen: mindenki megvalósít egy teljes, végigérő funkciót is, és minden kódot egy másik tag néz át. A 3. alkalomig: a WPF + ASP.NET Core jóváhagyatása, adatbázis és kommunikációs protokoll kiválasztása, architektúra és adatmodell, drótvázak, leltárfolyamat, kiegészítő funkció javaslat, 10–15 oldal dokumentáció. Köszönjük, várjuk a kérdéseket.</a:t>
-            </a:r>
-            <a:endParaRPr lang="en-US" dirty="0"/>
+              <a:rPr lang="en-US" dirty="0"/>
+              <a:t>~35 </a:t>
+            </a:r>
+            <a:r>
+              <a:rPr lang="en-US" dirty="0" err="1"/>
+              <a:t>mp</a:t>
+            </a:r>
+            <a:r>
+              <a:rPr lang="en-US" dirty="0"/>
+              <a:t> – </a:t>
+            </a:r>
+            <a:r>
+              <a:rPr lang="en-US" dirty="0" err="1"/>
+              <a:t>mindhárman</a:t>
+            </a:r>
+            <a:r>
+              <a:rPr lang="en-US" dirty="0"/>
+              <a:t>, </a:t>
+            </a:r>
+            <a:r>
+              <a:rPr lang="en-US" dirty="0" err="1"/>
+              <a:t>egy-egy</a:t>
+            </a:r>
+            <a:r>
+              <a:rPr lang="en-US" dirty="0"/>
+              <a:t> </a:t>
+            </a:r>
+            <a:r>
+              <a:rPr lang="en-US" dirty="0" err="1"/>
+              <a:t>mondatban</a:t>
+            </a:r>
+            <a:r>
+              <a:rPr lang="en-US" dirty="0"/>
+              <a:t> a </a:t>
+            </a:r>
+            <a:r>
+              <a:rPr lang="en-US" dirty="0" err="1"/>
+              <a:t>saját</a:t>
+            </a:r>
+            <a:r>
+              <a:rPr lang="en-US" dirty="0"/>
+              <a:t> </a:t>
+            </a:r>
+            <a:r>
+              <a:rPr lang="en-US" dirty="0" err="1"/>
+              <a:t>területükről</a:t>
+            </a:r>
+            <a:r>
+              <a:rPr lang="en-US" dirty="0"/>
+              <a:t>. Bárkányi Máté: </a:t>
+            </a:r>
+            <a:r>
+              <a:rPr lang="en-US" dirty="0" err="1"/>
+              <a:t>kliens</a:t>
+            </a:r>
+            <a:r>
+              <a:rPr lang="en-US" dirty="0"/>
+              <a:t> </a:t>
+            </a:r>
+            <a:r>
+              <a:rPr lang="en-US" dirty="0" err="1"/>
+              <a:t>és</a:t>
+            </a:r>
+            <a:r>
+              <a:rPr lang="en-US" dirty="0"/>
+              <a:t> </a:t>
+            </a:r>
+            <a:r>
+              <a:rPr lang="en-US" dirty="0" err="1"/>
+              <a:t>felhasználói</a:t>
+            </a:r>
+            <a:r>
+              <a:rPr lang="en-US" dirty="0"/>
+              <a:t> </a:t>
+            </a:r>
+            <a:r>
+              <a:rPr lang="en-US" dirty="0" err="1"/>
+              <a:t>élmény</a:t>
+            </a:r>
+            <a:r>
+              <a:rPr lang="en-US" dirty="0"/>
+              <a:t> – GUI, </a:t>
+            </a:r>
+            <a:r>
+              <a:rPr lang="en-US" dirty="0" err="1"/>
+              <a:t>leltározó</a:t>
+            </a:r>
+            <a:r>
+              <a:rPr lang="en-US" dirty="0"/>
+              <a:t> </a:t>
+            </a:r>
+            <a:r>
+              <a:rPr lang="en-US" dirty="0" err="1"/>
+              <a:t>képernyő</a:t>
+            </a:r>
+            <a:r>
+              <a:rPr lang="en-US" dirty="0"/>
+              <a:t>, </a:t>
+            </a:r>
+            <a:r>
+              <a:rPr lang="en-US" dirty="0" err="1"/>
+              <a:t>demó</a:t>
+            </a:r>
+            <a:r>
+              <a:rPr lang="en-US" dirty="0"/>
+              <a:t> </a:t>
+            </a:r>
+            <a:r>
+              <a:rPr lang="en-US" dirty="0" err="1"/>
+              <a:t>mód</a:t>
+            </a:r>
+            <a:r>
+              <a:rPr lang="en-US" dirty="0"/>
+              <a:t>. Horváth Máté: </a:t>
+            </a:r>
+            <a:r>
+              <a:rPr lang="en-US" dirty="0" err="1"/>
+              <a:t>szerver</a:t>
+            </a:r>
+            <a:r>
+              <a:rPr lang="en-US" dirty="0"/>
+              <a:t> </a:t>
+            </a:r>
+            <a:r>
+              <a:rPr lang="en-US" dirty="0" err="1"/>
+              <a:t>és</a:t>
+            </a:r>
+            <a:r>
+              <a:rPr lang="en-US" dirty="0"/>
+              <a:t> </a:t>
+            </a:r>
+            <a:r>
+              <a:rPr lang="en-US" dirty="0" err="1"/>
+              <a:t>üzleti</a:t>
+            </a:r>
+            <a:r>
+              <a:rPr lang="en-US" dirty="0"/>
+              <a:t> </a:t>
+            </a:r>
+            <a:r>
+              <a:rPr lang="en-US" dirty="0" err="1"/>
+              <a:t>logika</a:t>
+            </a:r>
+            <a:r>
+              <a:rPr lang="en-US" dirty="0"/>
+              <a:t> – </a:t>
+            </a:r>
+            <a:r>
+              <a:rPr lang="en-US" dirty="0" err="1"/>
+              <a:t>architektúra</a:t>
+            </a:r>
+            <a:r>
+              <a:rPr lang="en-US" dirty="0"/>
+              <a:t>, API, </a:t>
+            </a:r>
+            <a:r>
+              <a:rPr lang="en-US" dirty="0" err="1"/>
+              <a:t>leltárlogika</a:t>
+            </a:r>
+            <a:r>
+              <a:rPr lang="en-US" dirty="0"/>
+              <a:t>. Kiss Barnabás: </a:t>
+            </a:r>
+            <a:r>
+              <a:rPr lang="en-US" dirty="0" err="1"/>
+              <a:t>adat</a:t>
+            </a:r>
+            <a:r>
+              <a:rPr lang="en-US" dirty="0"/>
+              <a:t> </a:t>
+            </a:r>
+            <a:r>
+              <a:rPr lang="en-US" dirty="0" err="1"/>
+              <a:t>és</a:t>
+            </a:r>
+            <a:r>
+              <a:rPr lang="en-US" dirty="0"/>
+              <a:t> </a:t>
+            </a:r>
+            <a:r>
+              <a:rPr lang="en-US" dirty="0" err="1"/>
+              <a:t>minőség</a:t>
+            </a:r>
+            <a:r>
+              <a:rPr lang="en-US" dirty="0"/>
+              <a:t> – </a:t>
+            </a:r>
+            <a:r>
+              <a:rPr lang="en-US" dirty="0" err="1"/>
+              <a:t>adatmodell</a:t>
+            </a:r>
+            <a:r>
+              <a:rPr lang="en-US" dirty="0"/>
+              <a:t>, import/export, </a:t>
+            </a:r>
+            <a:r>
+              <a:rPr lang="en-US" dirty="0" err="1"/>
+              <a:t>tesztelés</a:t>
+            </a:r>
+            <a:r>
+              <a:rPr lang="en-US" dirty="0"/>
+              <a:t>. </a:t>
+            </a:r>
+            <a:r>
+              <a:rPr lang="en-US" dirty="0" err="1"/>
+              <a:t>Közösen</a:t>
+            </a:r>
+            <a:r>
+              <a:rPr lang="en-US" dirty="0"/>
+              <a:t>: </a:t>
+            </a:r>
+            <a:r>
+              <a:rPr lang="en-US" dirty="0" err="1"/>
+              <a:t>mindenki</a:t>
+            </a:r>
+            <a:r>
+              <a:rPr lang="en-US" dirty="0"/>
+              <a:t> </a:t>
+            </a:r>
+            <a:r>
+              <a:rPr lang="en-US" dirty="0" err="1"/>
+              <a:t>megvalósít</a:t>
+            </a:r>
+            <a:r>
+              <a:rPr lang="en-US" dirty="0"/>
+              <a:t> </a:t>
+            </a:r>
+            <a:r>
+              <a:rPr lang="en-US" dirty="0" err="1"/>
+              <a:t>egy</a:t>
+            </a:r>
+            <a:r>
+              <a:rPr lang="en-US" dirty="0"/>
+              <a:t> </a:t>
+            </a:r>
+            <a:r>
+              <a:rPr lang="en-US" dirty="0" err="1"/>
+              <a:t>teljes</a:t>
+            </a:r>
+            <a:r>
+              <a:rPr lang="en-US" dirty="0"/>
+              <a:t>, </a:t>
+            </a:r>
+            <a:r>
+              <a:rPr lang="en-US" dirty="0" err="1"/>
+              <a:t>végigérő</a:t>
+            </a:r>
+            <a:r>
+              <a:rPr lang="en-US" dirty="0"/>
+              <a:t> </a:t>
+            </a:r>
+            <a:r>
+              <a:rPr lang="en-US" dirty="0" err="1"/>
+              <a:t>funkciót</a:t>
+            </a:r>
+            <a:r>
+              <a:rPr lang="en-US" dirty="0"/>
+              <a:t> is, </a:t>
+            </a:r>
+            <a:r>
+              <a:rPr lang="en-US" dirty="0" err="1"/>
+              <a:t>és</a:t>
+            </a:r>
+            <a:r>
+              <a:rPr lang="en-US" dirty="0"/>
+              <a:t> </a:t>
+            </a:r>
+            <a:r>
+              <a:rPr lang="en-US" dirty="0" err="1"/>
+              <a:t>minden</a:t>
+            </a:r>
+            <a:r>
+              <a:rPr lang="en-US" dirty="0"/>
+              <a:t> </a:t>
+            </a:r>
+            <a:r>
+              <a:rPr lang="en-US" dirty="0" err="1"/>
+              <a:t>kódot</a:t>
+            </a:r>
+            <a:r>
+              <a:rPr lang="en-US" dirty="0"/>
+              <a:t> </a:t>
+            </a:r>
+            <a:r>
+              <a:rPr lang="en-US" dirty="0" err="1"/>
+              <a:t>egy</a:t>
+            </a:r>
+            <a:r>
+              <a:rPr lang="en-US" dirty="0"/>
+              <a:t> </a:t>
+            </a:r>
+            <a:r>
+              <a:rPr lang="en-US" dirty="0" err="1"/>
+              <a:t>másik</a:t>
+            </a:r>
+            <a:r>
+              <a:rPr lang="en-US" dirty="0"/>
+              <a:t> tag </a:t>
+            </a:r>
+            <a:r>
+              <a:rPr lang="en-US" dirty="0" err="1"/>
+              <a:t>néz</a:t>
+            </a:r>
+            <a:r>
+              <a:rPr lang="en-US" dirty="0"/>
+              <a:t> </a:t>
+            </a:r>
+            <a:r>
+              <a:rPr lang="en-US" dirty="0" err="1"/>
+              <a:t>át</a:t>
+            </a:r>
+            <a:r>
+              <a:rPr lang="en-US" dirty="0"/>
+              <a:t>. A 3. </a:t>
+            </a:r>
+            <a:r>
+              <a:rPr lang="en-US" dirty="0" err="1"/>
+              <a:t>alkalomig</a:t>
+            </a:r>
+            <a:r>
+              <a:rPr lang="en-US" dirty="0"/>
+              <a:t>: a WPF + ASP.NET Core </a:t>
+            </a:r>
+            <a:r>
+              <a:rPr lang="en-US" dirty="0" err="1"/>
+              <a:t>jóváhagyatása</a:t>
+            </a:r>
+            <a:r>
+              <a:rPr lang="en-US" dirty="0"/>
+              <a:t>, </a:t>
+            </a:r>
+            <a:r>
+              <a:rPr lang="en-US" dirty="0" err="1"/>
+              <a:t>adatbázis</a:t>
+            </a:r>
+            <a:r>
+              <a:rPr lang="en-US" dirty="0"/>
+              <a:t> </a:t>
+            </a:r>
+            <a:r>
+              <a:rPr lang="en-US" dirty="0" err="1"/>
+              <a:t>és</a:t>
+            </a:r>
+            <a:r>
+              <a:rPr lang="en-US" dirty="0"/>
+              <a:t> </a:t>
+            </a:r>
+            <a:r>
+              <a:rPr lang="en-US" dirty="0" err="1"/>
+              <a:t>kommunikációs</a:t>
+            </a:r>
+            <a:r>
+              <a:rPr lang="en-US" dirty="0"/>
+              <a:t> </a:t>
+            </a:r>
+            <a:r>
+              <a:rPr lang="en-US" dirty="0" err="1"/>
+              <a:t>protokoll</a:t>
+            </a:r>
+            <a:r>
+              <a:rPr lang="en-US" dirty="0"/>
+              <a:t> </a:t>
+            </a:r>
+            <a:r>
+              <a:rPr lang="en-US" dirty="0" err="1"/>
+              <a:t>kiválasztása</a:t>
+            </a:r>
+            <a:r>
+              <a:rPr lang="en-US" dirty="0"/>
+              <a:t>, </a:t>
+            </a:r>
+            <a:r>
+              <a:rPr lang="en-US" dirty="0" err="1"/>
+              <a:t>architektúra</a:t>
+            </a:r>
+            <a:r>
+              <a:rPr lang="en-US" dirty="0"/>
+              <a:t> </a:t>
+            </a:r>
+            <a:r>
+              <a:rPr lang="en-US" dirty="0" err="1"/>
+              <a:t>és</a:t>
+            </a:r>
+            <a:r>
+              <a:rPr lang="en-US" dirty="0"/>
+              <a:t> </a:t>
+            </a:r>
+            <a:r>
+              <a:rPr lang="en-US" dirty="0" err="1"/>
+              <a:t>adatmodell</a:t>
+            </a:r>
+            <a:r>
+              <a:rPr lang="en-US" dirty="0"/>
+              <a:t>, </a:t>
+            </a:r>
+            <a:r>
+              <a:rPr lang="en-US" dirty="0" err="1"/>
+              <a:t>drótvázak</a:t>
+            </a:r>
+            <a:r>
+              <a:rPr lang="en-US" dirty="0"/>
+              <a:t>, </a:t>
+            </a:r>
+            <a:r>
+              <a:rPr lang="en-US" dirty="0" err="1"/>
+              <a:t>leltárfolyamat</a:t>
+            </a:r>
+            <a:r>
+              <a:rPr lang="en-US" dirty="0"/>
+              <a:t>, </a:t>
+            </a:r>
+            <a:r>
+              <a:rPr lang="en-US" dirty="0" err="1"/>
+              <a:t>kiegészítő</a:t>
+            </a:r>
+            <a:r>
+              <a:rPr lang="en-US" dirty="0"/>
+              <a:t> </a:t>
+            </a:r>
+            <a:r>
+              <a:rPr lang="en-US" dirty="0" err="1"/>
+              <a:t>funkció</a:t>
+            </a:r>
+            <a:r>
+              <a:rPr lang="en-US" dirty="0"/>
+              <a:t> </a:t>
+            </a:r>
+            <a:r>
+              <a:rPr lang="en-US" dirty="0" err="1"/>
+              <a:t>javaslat</a:t>
+            </a:r>
+            <a:r>
+              <a:rPr lang="en-US" dirty="0"/>
+              <a:t>, 10–15 </a:t>
+            </a:r>
+            <a:r>
+              <a:rPr lang="en-US" dirty="0" err="1"/>
+              <a:t>oldal</a:t>
+            </a:r>
+            <a:r>
+              <a:rPr lang="en-US" dirty="0"/>
+              <a:t> </a:t>
+            </a:r>
+            <a:r>
+              <a:rPr lang="en-US" dirty="0" err="1"/>
+              <a:t>dokumentáció</a:t>
+            </a:r>
+            <a:r>
+              <a:rPr lang="en-US" dirty="0"/>
+              <a:t>. </a:t>
+            </a:r>
+            <a:r>
+              <a:rPr lang="en-US" dirty="0" err="1"/>
+              <a:t>Köszönjük</a:t>
+            </a:r>
+            <a:r>
+              <a:rPr lang="en-US" dirty="0"/>
+              <a:t>, </a:t>
+            </a:r>
+            <a:r>
+              <a:rPr lang="en-US" dirty="0" err="1"/>
+              <a:t>várjuk</a:t>
+            </a:r>
+            <a:r>
+              <a:rPr lang="en-US" dirty="0"/>
+              <a:t> a </a:t>
+            </a:r>
+            <a:r>
+              <a:rPr lang="en-US" dirty="0" err="1"/>
+              <a:t>kérdéseket</a:t>
+            </a:r>
+            <a:r>
+              <a:rPr lang="en-US" dirty="0"/>
+              <a:t>.</a:t>
+            </a:r>
           </a:p>
         </p:txBody>
       </p:sp>
@@ -1427,7 +3436,7 @@
               <a:buNone/>
             </a:pPr>
             <a:r>
-              <a:rPr lang="hu-HU" sz="1300" dirty="0" smtClean="0">
+              <a:rPr lang="hu-HU" sz="1300" dirty="0">
                 <a:solidFill>
                   <a:srgbClr val="C9DADD"/>
                 </a:solidFill>
@@ -1438,7 +3447,7 @@
               <a:t>Bárkányi Máté</a:t>
             </a:r>
             <a:r>
-              <a:rPr lang="en-US" sz="1300" dirty="0" smtClean="0">
+              <a:rPr lang="en-US" sz="1300" dirty="0">
                 <a:solidFill>
                   <a:srgbClr val="C9DADD"/>
                 </a:solidFill>
@@ -1446,7 +3455,18 @@
                 <a:ea typeface="Calibri" pitchFamily="34" charset="-122"/>
                 <a:cs typeface="Calibri" pitchFamily="34" charset="-120"/>
               </a:rPr>
-              <a:t>  </a:t>
+              <a:t>  ·  </a:t>
+            </a:r>
+            <a:r>
+              <a:rPr lang="hu-HU" sz="1300" dirty="0">
+                <a:solidFill>
+                  <a:srgbClr val="C9DADD"/>
+                </a:solidFill>
+                <a:latin typeface="Calibri" pitchFamily="34" charset="0"/>
+                <a:ea typeface="Calibri" pitchFamily="34" charset="-122"/>
+                <a:cs typeface="Calibri" pitchFamily="34" charset="-120"/>
+              </a:rPr>
+              <a:t>Horváth Máté</a:t>
             </a:r>
             <a:r>
               <a:rPr lang="en-US" sz="1300" dirty="0">
@@ -1457,43 +3477,10 @@
                 <a:ea typeface="Calibri" pitchFamily="34" charset="-122"/>
                 <a:cs typeface="Calibri" pitchFamily="34" charset="-120"/>
               </a:rPr>
-              <a:t>·  </a:t>
-            </a:r>
-            <a:r>
-              <a:rPr lang="hu-HU" sz="1300" dirty="0" smtClean="0">
-                <a:solidFill>
-                  <a:srgbClr val="C9DADD"/>
-                </a:solidFill>
-                <a:latin typeface="Calibri" pitchFamily="34" charset="0"/>
-                <a:ea typeface="Calibri" pitchFamily="34" charset="-122"/>
-                <a:cs typeface="Calibri" pitchFamily="34" charset="-120"/>
-              </a:rPr>
-              <a:t>Horváth Máté</a:t>
-            </a:r>
-            <a:r>
-              <a:rPr lang="en-US" sz="1300" dirty="0" smtClean="0">
-                <a:solidFill>
-                  <a:srgbClr val="C9DADD"/>
-                </a:solidFill>
-                <a:latin typeface="Calibri" pitchFamily="34" charset="0"/>
-                <a:ea typeface="Calibri" pitchFamily="34" charset="-122"/>
-                <a:cs typeface="Calibri" pitchFamily="34" charset="-120"/>
-              </a:rPr>
-              <a:t>  </a:t>
-            </a:r>
-            <a:r>
-              <a:rPr lang="en-US" sz="1300" dirty="0">
-                <a:solidFill>
-                  <a:srgbClr val="C9DADD"/>
-                </a:solidFill>
-                <a:latin typeface="Calibri" pitchFamily="34" charset="0"/>
-                <a:ea typeface="Calibri" pitchFamily="34" charset="-122"/>
-                <a:cs typeface="Calibri" pitchFamily="34" charset="-120"/>
-              </a:rPr>
-              <a:t>·  </a:t>
-            </a:r>
-            <a:r>
-              <a:rPr lang="hu-HU" sz="1300" dirty="0" smtClean="0">
+              <a:t>  ·  </a:t>
+            </a:r>
+            <a:r>
+              <a:rPr lang="hu-HU" sz="1300" dirty="0">
                 <a:solidFill>
                   <a:srgbClr val="C9DADD"/>
                 </a:solidFill>
@@ -1530,6 +3517,13 @@
             <a:prstDash val="solid"/>
           </a:ln>
         </p:spPr>
+        <p:txBody>
+          <a:bodyPr/>
+          <a:lstStyle/>
+          <a:p>
+            <a:endParaRPr lang="hu-HU"/>
+          </a:p>
+        </p:txBody>
       </p:sp>
       <p:sp>
         <p:nvSpPr>
@@ -1555,6 +3549,13 @@
             <a:prstDash val="solid"/>
           </a:ln>
         </p:spPr>
+        <p:txBody>
+          <a:bodyPr/>
+          <a:lstStyle/>
+          <a:p>
+            <a:endParaRPr lang="hu-HU"/>
+          </a:p>
+        </p:txBody>
       </p:sp>
       <p:sp>
         <p:nvSpPr>
@@ -1580,6 +3581,13 @@
             <a:prstDash val="solid"/>
           </a:ln>
         </p:spPr>
+        <p:txBody>
+          <a:bodyPr/>
+          <a:lstStyle/>
+          <a:p>
+            <a:endParaRPr lang="hu-HU"/>
+          </a:p>
+        </p:txBody>
       </p:sp>
       <p:sp>
         <p:nvSpPr>
@@ -1605,6 +3613,13 @@
             <a:prstDash val="solid"/>
           </a:ln>
         </p:spPr>
+        <p:txBody>
+          <a:bodyPr/>
+          <a:lstStyle/>
+          <a:p>
+            <a:endParaRPr lang="hu-HU"/>
+          </a:p>
+        </p:txBody>
       </p:sp>
       <p:sp>
         <p:nvSpPr>
@@ -1630,6 +3645,13 @@
             <a:prstDash val="solid"/>
           </a:ln>
         </p:spPr>
+        <p:txBody>
+          <a:bodyPr/>
+          <a:lstStyle/>
+          <a:p>
+            <a:endParaRPr lang="hu-HU"/>
+          </a:p>
+        </p:txBody>
       </p:sp>
       <p:sp>
         <p:nvSpPr>
@@ -1655,6 +3677,13 @@
             <a:prstDash val="solid"/>
           </a:ln>
         </p:spPr>
+        <p:txBody>
+          <a:bodyPr/>
+          <a:lstStyle/>
+          <a:p>
+            <a:endParaRPr lang="hu-HU"/>
+          </a:p>
+        </p:txBody>
       </p:sp>
       <p:sp>
         <p:nvSpPr>
@@ -1680,6 +3709,13 @@
             <a:prstDash val="solid"/>
           </a:ln>
         </p:spPr>
+        <p:txBody>
+          <a:bodyPr/>
+          <a:lstStyle/>
+          <a:p>
+            <a:endParaRPr lang="hu-HU"/>
+          </a:p>
+        </p:txBody>
       </p:sp>
       <p:sp>
         <p:nvSpPr>
@@ -1705,6 +3741,13 @@
             <a:prstDash val="solid"/>
           </a:ln>
         </p:spPr>
+        <p:txBody>
+          <a:bodyPr/>
+          <a:lstStyle/>
+          <a:p>
+            <a:endParaRPr lang="hu-HU"/>
+          </a:p>
+        </p:txBody>
       </p:sp>
       <p:sp>
         <p:nvSpPr>
@@ -1730,6 +3773,13 @@
             <a:prstDash val="solid"/>
           </a:ln>
         </p:spPr>
+        <p:txBody>
+          <a:bodyPr/>
+          <a:lstStyle/>
+          <a:p>
+            <a:endParaRPr lang="hu-HU"/>
+          </a:p>
+        </p:txBody>
       </p:sp>
       <p:sp>
         <p:nvSpPr>
@@ -1755,6 +3805,13 @@
             <a:prstDash val="solid"/>
           </a:ln>
         </p:spPr>
+        <p:txBody>
+          <a:bodyPr/>
+          <a:lstStyle/>
+          <a:p>
+            <a:endParaRPr lang="hu-HU"/>
+          </a:p>
+        </p:txBody>
       </p:sp>
       <p:sp>
         <p:nvSpPr>
@@ -1780,6 +3837,13 @@
             <a:prstDash val="solid"/>
           </a:ln>
         </p:spPr>
+        <p:txBody>
+          <a:bodyPr/>
+          <a:lstStyle/>
+          <a:p>
+            <a:endParaRPr lang="hu-HU"/>
+          </a:p>
+        </p:txBody>
       </p:sp>
       <p:sp>
         <p:nvSpPr>
@@ -1805,6 +3869,13 @@
             <a:prstDash val="solid"/>
           </a:ln>
         </p:spPr>
+        <p:txBody>
+          <a:bodyPr/>
+          <a:lstStyle/>
+          <a:p>
+            <a:endParaRPr lang="hu-HU"/>
+          </a:p>
+        </p:txBody>
       </p:sp>
       <p:sp>
         <p:nvSpPr>
@@ -1830,6 +3901,13 @@
             <a:prstDash val="solid"/>
           </a:ln>
         </p:spPr>
+        <p:txBody>
+          <a:bodyPr/>
+          <a:lstStyle/>
+          <a:p>
+            <a:endParaRPr lang="hu-HU"/>
+          </a:p>
+        </p:txBody>
       </p:sp>
       <p:sp>
         <p:nvSpPr>
@@ -1855,6 +3933,13 @@
             <a:prstDash val="solid"/>
           </a:ln>
         </p:spPr>
+        <p:txBody>
+          <a:bodyPr/>
+          <a:lstStyle/>
+          <a:p>
+            <a:endParaRPr lang="hu-HU"/>
+          </a:p>
+        </p:txBody>
       </p:sp>
       <p:sp>
         <p:nvSpPr>
@@ -1880,6 +3965,13 @@
             <a:prstDash val="solid"/>
           </a:ln>
         </p:spPr>
+        <p:txBody>
+          <a:bodyPr/>
+          <a:lstStyle/>
+          <a:p>
+            <a:endParaRPr lang="hu-HU"/>
+          </a:p>
+        </p:txBody>
       </p:sp>
       <p:sp>
         <p:nvSpPr>
@@ -1905,6 +3997,13 @@
             <a:prstDash val="solid"/>
           </a:ln>
         </p:spPr>
+        <p:txBody>
+          <a:bodyPr/>
+          <a:lstStyle/>
+          <a:p>
+            <a:endParaRPr lang="hu-HU"/>
+          </a:p>
+        </p:txBody>
       </p:sp>
       <p:sp>
         <p:nvSpPr>
@@ -1969,6 +4068,13 @@
             <a:prstDash val="solid"/>
           </a:ln>
         </p:spPr>
+        <p:txBody>
+          <a:bodyPr/>
+          <a:lstStyle/>
+          <a:p>
+            <a:endParaRPr lang="hu-HU"/>
+          </a:p>
+        </p:txBody>
       </p:sp>
     </p:spTree>
   </p:cSld>
@@ -2107,6 +4213,13 @@
             <a:prstDash val="solid"/>
           </a:ln>
         </p:spPr>
+        <p:txBody>
+          <a:bodyPr/>
+          <a:lstStyle/>
+          <a:p>
+            <a:endParaRPr lang="hu-HU"/>
+          </a:p>
+        </p:txBody>
       </p:sp>
       <p:sp>
         <p:nvSpPr>
@@ -2132,6 +4245,13 @@
             <a:prstDash val="solid"/>
           </a:ln>
         </p:spPr>
+        <p:txBody>
+          <a:bodyPr/>
+          <a:lstStyle/>
+          <a:p>
+            <a:endParaRPr lang="hu-HU"/>
+          </a:p>
+        </p:txBody>
       </p:sp>
       <p:pic>
         <p:nvPicPr>
@@ -2261,6 +4381,13 @@
             <a:prstDash val="solid"/>
           </a:ln>
         </p:spPr>
+        <p:txBody>
+          <a:bodyPr/>
+          <a:lstStyle/>
+          <a:p>
+            <a:endParaRPr lang="hu-HU"/>
+          </a:p>
+        </p:txBody>
       </p:sp>
       <p:sp>
         <p:nvSpPr>
@@ -2286,6 +4413,13 @@
             <a:prstDash val="solid"/>
           </a:ln>
         </p:spPr>
+        <p:txBody>
+          <a:bodyPr/>
+          <a:lstStyle/>
+          <a:p>
+            <a:endParaRPr lang="hu-HU"/>
+          </a:p>
+        </p:txBody>
       </p:sp>
       <p:pic>
         <p:nvPicPr>
@@ -2415,6 +4549,13 @@
             <a:prstDash val="solid"/>
           </a:ln>
         </p:spPr>
+        <p:txBody>
+          <a:bodyPr/>
+          <a:lstStyle/>
+          <a:p>
+            <a:endParaRPr lang="hu-HU"/>
+          </a:p>
+        </p:txBody>
       </p:sp>
       <p:sp>
         <p:nvSpPr>
@@ -2440,6 +4581,13 @@
             <a:prstDash val="solid"/>
           </a:ln>
         </p:spPr>
+        <p:txBody>
+          <a:bodyPr/>
+          <a:lstStyle/>
+          <a:p>
+            <a:endParaRPr lang="hu-HU"/>
+          </a:p>
+        </p:txBody>
       </p:sp>
       <p:pic>
         <p:nvPicPr>
@@ -2569,6 +4717,13 @@
             <a:prstDash val="solid"/>
           </a:ln>
         </p:spPr>
+        <p:txBody>
+          <a:bodyPr/>
+          <a:lstStyle/>
+          <a:p>
+            <a:endParaRPr lang="hu-HU"/>
+          </a:p>
+        </p:txBody>
       </p:sp>
       <p:sp>
         <p:nvSpPr>
@@ -2594,6 +4749,13 @@
             <a:prstDash val="solid"/>
           </a:ln>
         </p:spPr>
+        <p:txBody>
+          <a:bodyPr/>
+          <a:lstStyle/>
+          <a:p>
+            <a:endParaRPr lang="hu-HU"/>
+          </a:p>
+        </p:txBody>
       </p:sp>
       <p:pic>
         <p:nvPicPr>
@@ -2763,7 +4925,40 @@
                 <a:ea typeface="Calibri" pitchFamily="34" charset="-122"/>
                 <a:cs typeface="Calibri" pitchFamily="34" charset="-120"/>
               </a:rPr>
-              <a:t>Mit tanultunk hasonló rendszerekből?</a:t>
+              <a:t>Mit t</a:t>
+            </a:r>
+            <a:r>
+              <a:rPr lang="hu-HU" sz="2800" b="1" dirty="0" err="1">
+                <a:solidFill>
+                  <a:srgbClr val="12343B"/>
+                </a:solidFill>
+                <a:latin typeface="Calibri" pitchFamily="34" charset="0"/>
+                <a:ea typeface="Calibri" pitchFamily="34" charset="-122"/>
+                <a:cs typeface="Calibri" pitchFamily="34" charset="-120"/>
+              </a:rPr>
+              <a:t>alál</a:t>
+            </a:r>
+            <a:r>
+              <a:rPr lang="en-US" sz="2800" b="1" dirty="0" err="1">
+                <a:solidFill>
+                  <a:srgbClr val="12343B"/>
+                </a:solidFill>
+                <a:latin typeface="Calibri" pitchFamily="34" charset="0"/>
+                <a:ea typeface="Calibri" pitchFamily="34" charset="-122"/>
+                <a:cs typeface="Calibri" pitchFamily="34" charset="-120"/>
+              </a:rPr>
+              <a:t>tunk</a:t>
+            </a:r>
+            <a:r>
+              <a:rPr lang="en-US" sz="2800" b="1" dirty="0">
+                <a:solidFill>
+                  <a:srgbClr val="12343B"/>
+                </a:solidFill>
+                <a:latin typeface="Calibri" pitchFamily="34" charset="0"/>
+                <a:ea typeface="Calibri" pitchFamily="34" charset="-122"/>
+                <a:cs typeface="Calibri" pitchFamily="34" charset="-120"/>
+              </a:rPr>
+              <a:t> hasonló rendszerekből?</a:t>
             </a:r>
             <a:endParaRPr lang="en-US" sz="2800" dirty="0"/>
           </a:p>
@@ -2795,6 +4990,13 @@
             <a:prstDash val="solid"/>
           </a:ln>
         </p:spPr>
+        <p:txBody>
+          <a:bodyPr/>
+          <a:lstStyle/>
+          <a:p>
+            <a:endParaRPr lang="hu-HU"/>
+          </a:p>
+        </p:txBody>
       </p:sp>
       <p:sp>
         <p:nvSpPr>
@@ -2900,6 +5102,13 @@
             <a:prstDash val="solid"/>
           </a:ln>
         </p:spPr>
+        <p:txBody>
+          <a:bodyPr/>
+          <a:lstStyle/>
+          <a:p>
+            <a:endParaRPr lang="hu-HU"/>
+          </a:p>
+        </p:txBody>
       </p:sp>
       <p:sp>
         <p:nvSpPr>
@@ -3005,6 +5214,13 @@
             <a:prstDash val="solid"/>
           </a:ln>
         </p:spPr>
+        <p:txBody>
+          <a:bodyPr/>
+          <a:lstStyle/>
+          <a:p>
+            <a:endParaRPr lang="hu-HU"/>
+          </a:p>
+        </p:txBody>
       </p:sp>
       <p:sp>
         <p:nvSpPr>
@@ -3110,6 +5326,13 @@
             <a:prstDash val="solid"/>
           </a:ln>
         </p:spPr>
+        <p:txBody>
+          <a:bodyPr/>
+          <a:lstStyle/>
+          <a:p>
+            <a:endParaRPr lang="hu-HU"/>
+          </a:p>
+        </p:txBody>
       </p:sp>
       <p:sp>
         <p:nvSpPr>
@@ -3215,6 +5438,13 @@
             <a:prstDash val="solid"/>
           </a:ln>
         </p:spPr>
+        <p:txBody>
+          <a:bodyPr/>
+          <a:lstStyle/>
+          <a:p>
+            <a:endParaRPr lang="hu-HU"/>
+          </a:p>
+        </p:txBody>
       </p:sp>
       <p:sp>
         <p:nvSpPr>
@@ -3320,6 +5550,13 @@
             <a:prstDash val="solid"/>
           </a:ln>
         </p:spPr>
+        <p:txBody>
+          <a:bodyPr/>
+          <a:lstStyle/>
+          <a:p>
+            <a:endParaRPr lang="hu-HU"/>
+          </a:p>
+        </p:txBody>
       </p:sp>
       <p:sp>
         <p:nvSpPr>
@@ -3345,6 +5582,13 @@
             <a:prstDash val="solid"/>
           </a:ln>
         </p:spPr>
+        <p:txBody>
+          <a:bodyPr/>
+          <a:lstStyle/>
+          <a:p>
+            <a:endParaRPr lang="hu-HU"/>
+          </a:p>
+        </p:txBody>
       </p:sp>
       <p:pic>
         <p:nvPicPr>
@@ -3544,6 +5788,13 @@
             <a:prstDash val="solid"/>
           </a:ln>
         </p:spPr>
+        <p:txBody>
+          <a:bodyPr/>
+          <a:lstStyle/>
+          <a:p>
+            <a:endParaRPr lang="hu-HU"/>
+          </a:p>
+        </p:txBody>
       </p:sp>
       <p:pic>
         <p:nvPicPr>
@@ -3671,6 +5922,13 @@
             <a:prstDash val="solid"/>
           </a:ln>
         </p:spPr>
+        <p:txBody>
+          <a:bodyPr/>
+          <a:lstStyle/>
+          <a:p>
+            <a:endParaRPr lang="hu-HU"/>
+          </a:p>
+        </p:txBody>
       </p:sp>
       <p:pic>
         <p:nvPicPr>
@@ -3798,6 +6056,13 @@
             <a:prstDash val="solid"/>
           </a:ln>
         </p:spPr>
+        <p:txBody>
+          <a:bodyPr/>
+          <a:lstStyle/>
+          <a:p>
+            <a:endParaRPr lang="hu-HU"/>
+          </a:p>
+        </p:txBody>
       </p:sp>
       <p:pic>
         <p:nvPicPr>
@@ -3925,6 +6190,13 @@
             <a:prstDash val="solid"/>
           </a:ln>
         </p:spPr>
+        <p:txBody>
+          <a:bodyPr/>
+          <a:lstStyle/>
+          <a:p>
+            <a:endParaRPr lang="hu-HU"/>
+          </a:p>
+        </p:txBody>
       </p:sp>
       <p:pic>
         <p:nvPicPr>
@@ -4089,6 +6361,13 @@
             <a:prstDash val="solid"/>
           </a:ln>
         </p:spPr>
+        <p:txBody>
+          <a:bodyPr/>
+          <a:lstStyle/>
+          <a:p>
+            <a:endParaRPr lang="hu-HU"/>
+          </a:p>
+        </p:txBody>
       </p:sp>
       <p:sp>
         <p:nvSpPr>
@@ -4114,6 +6393,13 @@
             <a:prstDash val="solid"/>
           </a:ln>
         </p:spPr>
+        <p:txBody>
+          <a:bodyPr/>
+          <a:lstStyle/>
+          <a:p>
+            <a:endParaRPr lang="hu-HU"/>
+          </a:p>
+        </p:txBody>
       </p:sp>
       <p:sp>
         <p:nvSpPr>
@@ -4228,6 +6514,13 @@
             <a:prstDash val="solid"/>
           </a:ln>
         </p:spPr>
+        <p:txBody>
+          <a:bodyPr/>
+          <a:lstStyle/>
+          <a:p>
+            <a:endParaRPr lang="hu-HU"/>
+          </a:p>
+        </p:txBody>
       </p:sp>
       <p:sp>
         <p:nvSpPr>
@@ -4342,6 +6635,13 @@
             <a:prstDash val="solid"/>
           </a:ln>
         </p:spPr>
+        <p:txBody>
+          <a:bodyPr/>
+          <a:lstStyle/>
+          <a:p>
+            <a:endParaRPr lang="hu-HU"/>
+          </a:p>
+        </p:txBody>
       </p:sp>
       <p:sp>
         <p:nvSpPr>
@@ -4456,6 +6756,13 @@
             <a:prstDash val="solid"/>
           </a:ln>
         </p:spPr>
+        <p:txBody>
+          <a:bodyPr/>
+          <a:lstStyle/>
+          <a:p>
+            <a:endParaRPr lang="hu-HU"/>
+          </a:p>
+        </p:txBody>
       </p:sp>
       <p:sp>
         <p:nvSpPr>
@@ -4570,6 +6877,13 @@
             <a:prstDash val="solid"/>
           </a:ln>
         </p:spPr>
+        <p:txBody>
+          <a:bodyPr/>
+          <a:lstStyle/>
+          <a:p>
+            <a:endParaRPr lang="hu-HU"/>
+          </a:p>
+        </p:txBody>
       </p:sp>
       <p:sp>
         <p:nvSpPr>
@@ -4684,6 +6998,13 @@
             <a:prstDash val="solid"/>
           </a:ln>
         </p:spPr>
+        <p:txBody>
+          <a:bodyPr/>
+          <a:lstStyle/>
+          <a:p>
+            <a:endParaRPr lang="hu-HU"/>
+          </a:p>
+        </p:txBody>
       </p:sp>
       <p:sp>
         <p:nvSpPr>
@@ -4950,6 +7271,13 @@
             <a:prstDash val="solid"/>
           </a:ln>
         </p:spPr>
+        <p:txBody>
+          <a:bodyPr/>
+          <a:lstStyle/>
+          <a:p>
+            <a:endParaRPr lang="hu-HU"/>
+          </a:p>
+        </p:txBody>
       </p:sp>
       <p:sp>
         <p:nvSpPr>
@@ -5055,6 +7383,13 @@
             <a:prstDash val="solid"/>
           </a:ln>
         </p:spPr>
+        <p:txBody>
+          <a:bodyPr/>
+          <a:lstStyle/>
+          <a:p>
+            <a:endParaRPr lang="hu-HU"/>
+          </a:p>
+        </p:txBody>
       </p:sp>
       <p:sp>
         <p:nvSpPr>
@@ -5080,6 +7415,13 @@
             <a:prstDash val="solid"/>
           </a:ln>
         </p:spPr>
+        <p:txBody>
+          <a:bodyPr/>
+          <a:lstStyle/>
+          <a:p>
+            <a:endParaRPr lang="hu-HU"/>
+          </a:p>
+        </p:txBody>
       </p:sp>
       <p:pic>
         <p:nvPicPr>
@@ -5254,6 +7596,13 @@
             <a:prstDash val="solid"/>
           </a:ln>
         </p:spPr>
+        <p:txBody>
+          <a:bodyPr/>
+          <a:lstStyle/>
+          <a:p>
+            <a:endParaRPr lang="hu-HU"/>
+          </a:p>
+        </p:txBody>
       </p:sp>
       <p:sp>
         <p:nvSpPr>
@@ -5279,6 +7628,13 @@
             <a:prstDash val="solid"/>
           </a:ln>
         </p:spPr>
+        <p:txBody>
+          <a:bodyPr/>
+          <a:lstStyle/>
+          <a:p>
+            <a:endParaRPr lang="hu-HU"/>
+          </a:p>
+        </p:txBody>
       </p:sp>
       <p:pic>
         <p:nvPicPr>
@@ -5408,6 +7764,13 @@
             <a:prstDash val="solid"/>
           </a:ln>
         </p:spPr>
+        <p:txBody>
+          <a:bodyPr/>
+          <a:lstStyle/>
+          <a:p>
+            <a:endParaRPr lang="hu-HU"/>
+          </a:p>
+        </p:txBody>
       </p:sp>
       <p:sp>
         <p:nvSpPr>
@@ -5433,6 +7796,13 @@
             <a:prstDash val="solid"/>
           </a:ln>
         </p:spPr>
+        <p:txBody>
+          <a:bodyPr/>
+          <a:lstStyle/>
+          <a:p>
+            <a:endParaRPr lang="hu-HU"/>
+          </a:p>
+        </p:txBody>
       </p:sp>
       <p:pic>
         <p:nvPicPr>
@@ -5562,6 +7932,13 @@
             <a:prstDash val="solid"/>
           </a:ln>
         </p:spPr>
+        <p:txBody>
+          <a:bodyPr/>
+          <a:lstStyle/>
+          <a:p>
+            <a:endParaRPr lang="hu-HU"/>
+          </a:p>
+        </p:txBody>
       </p:sp>
       <p:sp>
         <p:nvSpPr>
@@ -5587,6 +7964,13 @@
             <a:prstDash val="solid"/>
           </a:ln>
         </p:spPr>
+        <p:txBody>
+          <a:bodyPr/>
+          <a:lstStyle/>
+          <a:p>
+            <a:endParaRPr lang="hu-HU"/>
+          </a:p>
+        </p:txBody>
       </p:sp>
       <p:pic>
         <p:nvPicPr>
@@ -5716,6 +8100,13 @@
             <a:prstDash val="solid"/>
           </a:ln>
         </p:spPr>
+        <p:txBody>
+          <a:bodyPr/>
+          <a:lstStyle/>
+          <a:p>
+            <a:endParaRPr lang="hu-HU"/>
+          </a:p>
+        </p:txBody>
       </p:sp>
       <p:sp>
         <p:nvSpPr>
@@ -5741,6 +8132,13 @@
             <a:prstDash val="solid"/>
           </a:ln>
         </p:spPr>
+        <p:txBody>
+          <a:bodyPr/>
+          <a:lstStyle/>
+          <a:p>
+            <a:endParaRPr lang="hu-HU"/>
+          </a:p>
+        </p:txBody>
       </p:sp>
       <p:pic>
         <p:nvPicPr>
@@ -5870,6 +8268,13 @@
             <a:prstDash val="solid"/>
           </a:ln>
         </p:spPr>
+        <p:txBody>
+          <a:bodyPr/>
+          <a:lstStyle/>
+          <a:p>
+            <a:endParaRPr lang="hu-HU"/>
+          </a:p>
+        </p:txBody>
       </p:sp>
       <p:sp>
         <p:nvSpPr>
@@ -5895,6 +8300,13 @@
             <a:prstDash val="solid"/>
           </a:ln>
         </p:spPr>
+        <p:txBody>
+          <a:bodyPr/>
+          <a:lstStyle/>
+          <a:p>
+            <a:endParaRPr lang="hu-HU"/>
+          </a:p>
+        </p:txBody>
       </p:sp>
       <p:pic>
         <p:nvPicPr>
@@ -6096,6 +8508,13 @@
             <a:prstDash val="solid"/>
           </a:ln>
         </p:spPr>
+        <p:txBody>
+          <a:bodyPr/>
+          <a:lstStyle/>
+          <a:p>
+            <a:endParaRPr lang="hu-HU"/>
+          </a:p>
+        </p:txBody>
       </p:sp>
       <p:sp>
         <p:nvSpPr>
@@ -6123,6 +8542,13 @@
             <a:prstDash val="solid"/>
           </a:ln>
         </p:spPr>
+        <p:txBody>
+          <a:bodyPr/>
+          <a:lstStyle/>
+          <a:p>
+            <a:endParaRPr lang="hu-HU"/>
+          </a:p>
+        </p:txBody>
       </p:sp>
       <p:sp>
         <p:nvSpPr>
@@ -6397,6 +8823,13 @@
             <a:prstDash val="solid"/>
           </a:ln>
         </p:spPr>
+        <p:txBody>
+          <a:bodyPr/>
+          <a:lstStyle/>
+          <a:p>
+            <a:endParaRPr lang="hu-HU"/>
+          </a:p>
+        </p:txBody>
       </p:sp>
       <p:sp>
         <p:nvSpPr>
@@ -6424,6 +8857,13 @@
             <a:prstDash val="solid"/>
           </a:ln>
         </p:spPr>
+        <p:txBody>
+          <a:bodyPr/>
+          <a:lstStyle/>
+          <a:p>
+            <a:endParaRPr lang="hu-HU"/>
+          </a:p>
+        </p:txBody>
       </p:sp>
       <p:sp>
         <p:nvSpPr>
@@ -6677,6 +9117,13 @@
             <a:prstDash val="solid"/>
           </a:ln>
         </p:spPr>
+        <p:txBody>
+          <a:bodyPr/>
+          <a:lstStyle/>
+          <a:p>
+            <a:endParaRPr lang="hu-HU"/>
+          </a:p>
+        </p:txBody>
       </p:sp>
       <p:sp>
         <p:nvSpPr>
@@ -6704,6 +9151,13 @@
             <a:prstDash val="solid"/>
           </a:ln>
         </p:spPr>
+        <p:txBody>
+          <a:bodyPr/>
+          <a:lstStyle/>
+          <a:p>
+            <a:endParaRPr lang="hu-HU"/>
+          </a:p>
+        </p:txBody>
       </p:sp>
       <p:sp>
         <p:nvSpPr>
@@ -7058,6 +9512,13 @@
             <a:prstDash val="solid"/>
           </a:ln>
         </p:spPr>
+        <p:txBody>
+          <a:bodyPr/>
+          <a:lstStyle/>
+          <a:p>
+            <a:endParaRPr lang="hu-HU"/>
+          </a:p>
+        </p:txBody>
       </p:sp>
       <p:sp>
         <p:nvSpPr>
@@ -7083,6 +9544,13 @@
             <a:prstDash val="solid"/>
           </a:ln>
         </p:spPr>
+        <p:txBody>
+          <a:bodyPr/>
+          <a:lstStyle/>
+          <a:p>
+            <a:endParaRPr lang="hu-HU"/>
+          </a:p>
+        </p:txBody>
       </p:sp>
       <p:pic>
         <p:nvPicPr>
@@ -7212,6 +9680,13 @@
             <a:prstDash val="solid"/>
           </a:ln>
         </p:spPr>
+        <p:txBody>
+          <a:bodyPr/>
+          <a:lstStyle/>
+          <a:p>
+            <a:endParaRPr lang="hu-HU"/>
+          </a:p>
+        </p:txBody>
       </p:sp>
       <p:sp>
         <p:nvSpPr>
@@ -7237,6 +9712,13 @@
             <a:prstDash val="solid"/>
           </a:ln>
         </p:spPr>
+        <p:txBody>
+          <a:bodyPr/>
+          <a:lstStyle/>
+          <a:p>
+            <a:endParaRPr lang="hu-HU"/>
+          </a:p>
+        </p:txBody>
       </p:sp>
       <p:pic>
         <p:nvPicPr>
@@ -7366,6 +9848,13 @@
             <a:prstDash val="solid"/>
           </a:ln>
         </p:spPr>
+        <p:txBody>
+          <a:bodyPr/>
+          <a:lstStyle/>
+          <a:p>
+            <a:endParaRPr lang="hu-HU"/>
+          </a:p>
+        </p:txBody>
       </p:sp>
       <p:sp>
         <p:nvSpPr>
@@ -7391,6 +9880,13 @@
             <a:prstDash val="solid"/>
           </a:ln>
         </p:spPr>
+        <p:txBody>
+          <a:bodyPr/>
+          <a:lstStyle/>
+          <a:p>
+            <a:endParaRPr lang="hu-HU"/>
+          </a:p>
+        </p:txBody>
       </p:sp>
       <p:pic>
         <p:nvPicPr>
@@ -7518,6 +10014,13 @@
             <a:tailEnd type="triangle"/>
           </a:ln>
         </p:spPr>
+        <p:txBody>
+          <a:bodyPr/>
+          <a:lstStyle/>
+          <a:p>
+            <a:endParaRPr lang="hu-HU"/>
+          </a:p>
+        </p:txBody>
       </p:sp>
       <p:sp>
         <p:nvSpPr>
@@ -7599,6 +10102,13 @@
             <a:tailEnd type="triangle"/>
           </a:ln>
         </p:spPr>
+        <p:txBody>
+          <a:bodyPr/>
+          <a:lstStyle/>
+          <a:p>
+            <a:endParaRPr lang="hu-HU"/>
+          </a:p>
+        </p:txBody>
       </p:sp>
       <p:sp>
         <p:nvSpPr>
@@ -7704,6 +10214,13 @@
             <a:prstDash val="solid"/>
           </a:ln>
         </p:spPr>
+        <p:txBody>
+          <a:bodyPr/>
+          <a:lstStyle/>
+          <a:p>
+            <a:endParaRPr lang="hu-HU"/>
+          </a:p>
+        </p:txBody>
       </p:sp>
       <p:sp>
         <p:nvSpPr>
@@ -7809,6 +10326,13 @@
             <a:prstDash val="solid"/>
           </a:ln>
         </p:spPr>
+        <p:txBody>
+          <a:bodyPr/>
+          <a:lstStyle/>
+          <a:p>
+            <a:endParaRPr lang="hu-HU"/>
+          </a:p>
+        </p:txBody>
       </p:sp>
       <p:sp>
         <p:nvSpPr>
@@ -7914,6 +10438,13 @@
             <a:prstDash val="solid"/>
           </a:ln>
         </p:spPr>
+        <p:txBody>
+          <a:bodyPr/>
+          <a:lstStyle/>
+          <a:p>
+            <a:endParaRPr lang="hu-HU"/>
+          </a:p>
+        </p:txBody>
       </p:sp>
       <p:sp>
         <p:nvSpPr>
@@ -8019,6 +10550,13 @@
             <a:prstDash val="solid"/>
           </a:ln>
         </p:spPr>
+        <p:txBody>
+          <a:bodyPr/>
+          <a:lstStyle/>
+          <a:p>
+            <a:endParaRPr lang="hu-HU"/>
+          </a:p>
+        </p:txBody>
       </p:sp>
       <p:sp>
         <p:nvSpPr>
@@ -8142,7 +10680,29 @@
                 <a:ea typeface="Calibri" pitchFamily="34" charset="-122"/>
                 <a:cs typeface="Calibri" pitchFamily="34" charset="-120"/>
               </a:rPr>
-              <a:t>WPF kliens + ASP.NET Core szerver (oktatói jóváhagyásra)  ·  adatbázis és kommunikációs protokoll: döntés a 3. alkalomig</a:t>
+              <a:t>WPF kliens + ASP.NET Core </a:t>
+            </a:r>
+            <a:r>
+              <a:rPr lang="en-US" sz="1150" dirty="0" err="1">
+                <a:solidFill>
+                  <a:srgbClr val="5B6B73"/>
+                </a:solidFill>
+                <a:latin typeface="Calibri" pitchFamily="34" charset="0"/>
+                <a:ea typeface="Calibri" pitchFamily="34" charset="-122"/>
+                <a:cs typeface="Calibri" pitchFamily="34" charset="-120"/>
+              </a:rPr>
+              <a:t>szerver</a:t>
+            </a:r>
+            <a:r>
+              <a:rPr lang="en-US" sz="1150" dirty="0">
+                <a:solidFill>
+                  <a:srgbClr val="5B6B73"/>
+                </a:solidFill>
+                <a:latin typeface="Calibri" pitchFamily="34" charset="0"/>
+                <a:ea typeface="Calibri" pitchFamily="34" charset="-122"/>
+                <a:cs typeface="Calibri" pitchFamily="34" charset="-120"/>
+              </a:rPr>
+              <a:t>  ·  adatbázis és kommunikációs protokoll: döntés a 3. alkalomig</a:t>
             </a:r>
             <a:endParaRPr lang="en-US" sz="1150" dirty="0"/>
           </a:p>
@@ -8206,7 +10766,7 @@
               <a:buNone/>
             </a:pPr>
             <a:r>
-              <a:rPr lang="en-US" sz="2800" b="1" dirty="0">
+              <a:rPr lang="en-US" sz="2800" b="1" dirty="0" err="1">
                 <a:solidFill>
                   <a:srgbClr val="FFFFFF"/>
                 </a:solidFill>
@@ -8214,845 +10774,850 @@
                 <a:ea typeface="Calibri" pitchFamily="34" charset="-122"/>
                 <a:cs typeface="Calibri" pitchFamily="34" charset="-120"/>
               </a:rPr>
-              <a:t>Munkamegosztás és következő lépések</a:t>
+              <a:t>Munkamegosztá</a:t>
+            </a:r>
+            <a:r>
+              <a:rPr lang="hu-HU" sz="2800" b="1" dirty="0">
+                <a:solidFill>
+                  <a:srgbClr val="FFFFFF"/>
+                </a:solidFill>
+                <a:latin typeface="Calibri" pitchFamily="34" charset="0"/>
+                <a:ea typeface="Calibri" pitchFamily="34" charset="-122"/>
+                <a:cs typeface="Calibri" pitchFamily="34" charset="-120"/>
+              </a:rPr>
+              <a:t>s</a:t>
             </a:r>
             <a:endParaRPr lang="en-US" sz="2800" dirty="0"/>
           </a:p>
         </p:txBody>
       </p:sp>
-      <p:sp>
-        <p:nvSpPr>
-          <p:cNvPr id="3" name="Shape 1"/>
-          <p:cNvSpPr/>
-          <p:nvPr/>
-        </p:nvSpPr>
-        <p:spPr>
-          <a:xfrm>
-            <a:off x="457200" y="1051560"/>
+      <p:grpSp>
+        <p:nvGrpSpPr>
+          <p:cNvPr id="27" name="Csoportba foglalás 26">
+            <a:extLst>
+              <a:ext uri="{FF2B5EF4-FFF2-40B4-BE49-F238E27FC236}">
+                <a16:creationId xmlns:a16="http://schemas.microsoft.com/office/drawing/2014/main" id="{185B1359-36B8-8B4C-9171-03D1CF9144EB}"/>
+              </a:ext>
+            </a:extLst>
+          </p:cNvPr>
+          <p:cNvGrpSpPr/>
+          <p:nvPr/>
+        </p:nvGrpSpPr>
+        <p:grpSpPr>
+          <a:xfrm>
+            <a:off x="1842516" y="1156716"/>
+            <a:ext cx="5458968" cy="1463040"/>
+            <a:chOff x="457200" y="1051560"/>
+            <a:chExt cx="5458968" cy="1463040"/>
+          </a:xfrm>
+        </p:grpSpPr>
+        <p:grpSp>
+          <p:nvGrpSpPr>
+            <p:cNvPr id="26" name="Csoportba foglalás 25">
+              <a:extLst>
+                <a:ext uri="{FF2B5EF4-FFF2-40B4-BE49-F238E27FC236}">
+                  <a16:creationId xmlns:a16="http://schemas.microsoft.com/office/drawing/2014/main" id="{25912050-BB30-C2B2-8B80-12811476F1A6}"/>
+                </a:ext>
+              </a:extLst>
+            </p:cNvPr>
+            <p:cNvGrpSpPr/>
+            <p:nvPr/>
+          </p:nvGrpSpPr>
+          <p:grpSpPr>
+            <a:xfrm>
+              <a:off x="457200" y="1051560"/>
+              <a:ext cx="2651760" cy="1463040"/>
+              <a:chOff x="457200" y="1051560"/>
+              <a:chExt cx="2651760" cy="1463040"/>
+            </a:xfrm>
+          </p:grpSpPr>
+          <p:sp>
+            <p:nvSpPr>
+              <p:cNvPr id="3" name="Shape 1"/>
+              <p:cNvSpPr/>
+              <p:nvPr/>
+            </p:nvSpPr>
+            <p:spPr>
+              <a:xfrm>
+                <a:off x="457200" y="1051560"/>
+                <a:ext cx="2651760" cy="1463040"/>
+              </a:xfrm>
+              <a:prstGeom prst="roundRect">
+                <a:avLst>
+                  <a:gd name="adj" fmla="val 6250"/>
+                </a:avLst>
+              </a:prstGeom>
+              <a:solidFill>
+                <a:srgbClr val="1F4B53"/>
+              </a:solidFill>
+              <a:ln w="12700">
+                <a:solidFill>
+                  <a:srgbClr val="1F4B53"/>
+                </a:solidFill>
+                <a:prstDash val="solid"/>
+              </a:ln>
+            </p:spPr>
+            <p:txBody>
+              <a:bodyPr/>
+              <a:lstStyle/>
+              <a:p>
+                <a:endParaRPr lang="hu-HU"/>
+              </a:p>
+            </p:txBody>
+          </p:sp>
+          <p:sp>
+            <p:nvSpPr>
+              <p:cNvPr id="4" name="Shape 2"/>
+              <p:cNvSpPr/>
+              <p:nvPr/>
+            </p:nvSpPr>
+            <p:spPr>
+              <a:xfrm>
+                <a:off x="640080" y="1207008"/>
+                <a:ext cx="457200" cy="457200"/>
+              </a:xfrm>
+              <a:prstGeom prst="ellipse">
+                <a:avLst/>
+              </a:prstGeom>
+              <a:solidFill>
+                <a:srgbClr val="F2A541"/>
+              </a:solidFill>
+              <a:ln w="12700">
+                <a:solidFill>
+                  <a:srgbClr val="F2A541"/>
+                </a:solidFill>
+                <a:prstDash val="solid"/>
+              </a:ln>
+            </p:spPr>
+            <p:txBody>
+              <a:bodyPr/>
+              <a:lstStyle/>
+              <a:p>
+                <a:endParaRPr lang="hu-HU"/>
+              </a:p>
+            </p:txBody>
+          </p:sp>
+          <p:sp>
+            <p:nvSpPr>
+              <p:cNvPr id="5" name="Text 3"/>
+              <p:cNvSpPr txBox="1"/>
+              <p:nvPr/>
+            </p:nvSpPr>
+            <p:spPr>
+              <a:xfrm>
+                <a:off x="640080" y="1207008"/>
+                <a:ext cx="457200" cy="457200"/>
+              </a:xfrm>
+              <a:prstGeom prst="rect">
+                <a:avLst/>
+              </a:prstGeom>
+              <a:noFill/>
+              <a:ln/>
+            </p:spPr>
+            <p:txBody>
+              <a:bodyPr wrap="square" lIns="0" tIns="0" rIns="0" bIns="0" rtlCol="0" anchor="ctr"/>
+              <a:lstStyle/>
+              <a:p>
+                <a:pPr marL="0" indent="0" algn="ctr">
+                  <a:buNone/>
+                </a:pPr>
+                <a:r>
+                  <a:rPr lang="en-US" sz="1600" b="1" dirty="0">
+                    <a:solidFill>
+                      <a:srgbClr val="12343B"/>
+                    </a:solidFill>
+                    <a:latin typeface="Calibri" pitchFamily="34" charset="0"/>
+                    <a:ea typeface="Calibri" pitchFamily="34" charset="-122"/>
+                    <a:cs typeface="Calibri" pitchFamily="34" charset="-120"/>
+                  </a:rPr>
+                  <a:t>A</a:t>
+                </a:r>
+                <a:endParaRPr lang="en-US" sz="1600" dirty="0"/>
+              </a:p>
+            </p:txBody>
+          </p:sp>
+          <p:sp>
+            <p:nvSpPr>
+              <p:cNvPr id="6" name="Text 4"/>
+              <p:cNvSpPr txBox="1"/>
+              <p:nvPr/>
+            </p:nvSpPr>
+            <p:spPr>
+              <a:xfrm>
+                <a:off x="1207008" y="1207008"/>
+                <a:ext cx="1828800" cy="457200"/>
+              </a:xfrm>
+              <a:prstGeom prst="rect">
+                <a:avLst/>
+              </a:prstGeom>
+              <a:noFill/>
+              <a:ln/>
+            </p:spPr>
+            <p:txBody>
+              <a:bodyPr wrap="square" lIns="0" tIns="0" rIns="0" bIns="0" rtlCol="0" anchor="ctr"/>
+              <a:lstStyle/>
+              <a:p>
+                <a:pPr marL="0" indent="0">
+                  <a:buNone/>
+                </a:pPr>
+                <a:r>
+                  <a:rPr lang="en-US" sz="1350" b="1" dirty="0">
+                    <a:solidFill>
+                      <a:srgbClr val="FFFFFF"/>
+                    </a:solidFill>
+                    <a:latin typeface="Calibri" pitchFamily="34" charset="0"/>
+                    <a:ea typeface="Calibri" pitchFamily="34" charset="-122"/>
+                    <a:cs typeface="Calibri" pitchFamily="34" charset="-120"/>
+                  </a:rPr>
+                  <a:t>Kliens és UX</a:t>
+                </a:r>
+                <a:endParaRPr lang="en-US" sz="1350" dirty="0"/>
+              </a:p>
+            </p:txBody>
+          </p:sp>
+          <p:sp>
+            <p:nvSpPr>
+              <p:cNvPr id="7" name="Text 5"/>
+              <p:cNvSpPr txBox="1"/>
+              <p:nvPr/>
+            </p:nvSpPr>
+            <p:spPr>
+              <a:xfrm>
+                <a:off x="640080" y="1755648"/>
+                <a:ext cx="2286000" cy="274320"/>
+              </a:xfrm>
+              <a:prstGeom prst="rect">
+                <a:avLst/>
+              </a:prstGeom>
+              <a:noFill/>
+              <a:ln/>
+            </p:spPr>
+            <p:txBody>
+              <a:bodyPr wrap="square" lIns="0" tIns="0" rIns="0" bIns="0" rtlCol="0" anchor="t"/>
+              <a:lstStyle/>
+              <a:p>
+                <a:pPr marL="0" indent="0">
+                  <a:buNone/>
+                </a:pPr>
+                <a:r>
+                  <a:rPr lang="en-US" sz="1300">
+                    <a:solidFill>
+                      <a:srgbClr val="F2A541"/>
+                    </a:solidFill>
+                    <a:latin typeface="Calibri" pitchFamily="34" charset="0"/>
+                    <a:ea typeface="Calibri" pitchFamily="34" charset="-122"/>
+                    <a:cs typeface="Calibri" pitchFamily="34" charset="-120"/>
+                  </a:rPr>
+                  <a:t>Bárkányi Máté</a:t>
+                </a:r>
+                <a:endParaRPr lang="en-US" sz="1300" dirty="0"/>
+              </a:p>
+            </p:txBody>
+          </p:sp>
+          <p:sp>
+            <p:nvSpPr>
+              <p:cNvPr id="8" name="Text 6"/>
+              <p:cNvSpPr txBox="1"/>
+              <p:nvPr/>
+            </p:nvSpPr>
+            <p:spPr>
+              <a:xfrm>
+                <a:off x="640080" y="2048256"/>
+                <a:ext cx="2331720" cy="365760"/>
+              </a:xfrm>
+              <a:prstGeom prst="rect">
+                <a:avLst/>
+              </a:prstGeom>
+              <a:noFill/>
+              <a:ln/>
+            </p:spPr>
+            <p:txBody>
+              <a:bodyPr wrap="square" lIns="0" tIns="0" rIns="0" bIns="0" rtlCol="0" anchor="t"/>
+              <a:lstStyle/>
+              <a:p>
+                <a:pPr marL="0" indent="0">
+                  <a:buNone/>
+                </a:pPr>
+                <a:r>
+                  <a:rPr lang="en-US" sz="1150" dirty="0">
+                    <a:solidFill>
+                      <a:srgbClr val="C9DADD"/>
+                    </a:solidFill>
+                    <a:latin typeface="Calibri" pitchFamily="34" charset="0"/>
+                    <a:ea typeface="Calibri" pitchFamily="34" charset="-122"/>
+                    <a:cs typeface="Calibri" pitchFamily="34" charset="-120"/>
+                  </a:rPr>
+                  <a:t>GUI, </a:t>
+                </a:r>
+                <a:r>
+                  <a:rPr lang="en-US" sz="1150" dirty="0" err="1">
+                    <a:solidFill>
+                      <a:srgbClr val="C9DADD"/>
+                    </a:solidFill>
+                    <a:latin typeface="Calibri" pitchFamily="34" charset="0"/>
+                    <a:ea typeface="Calibri" pitchFamily="34" charset="-122"/>
+                    <a:cs typeface="Calibri" pitchFamily="34" charset="-120"/>
+                  </a:rPr>
+                  <a:t>leltározó</a:t>
+                </a:r>
+                <a:r>
+                  <a:rPr lang="en-US" sz="1150" dirty="0">
+                    <a:solidFill>
+                      <a:srgbClr val="C9DADD"/>
+                    </a:solidFill>
+                    <a:latin typeface="Calibri" pitchFamily="34" charset="0"/>
+                    <a:ea typeface="Calibri" pitchFamily="34" charset="-122"/>
+                    <a:cs typeface="Calibri" pitchFamily="34" charset="-120"/>
+                  </a:rPr>
+                  <a:t> </a:t>
+                </a:r>
+                <a:r>
+                  <a:rPr lang="en-US" sz="1150" dirty="0" err="1">
+                    <a:solidFill>
+                      <a:srgbClr val="C9DADD"/>
+                    </a:solidFill>
+                    <a:latin typeface="Calibri" pitchFamily="34" charset="0"/>
+                    <a:ea typeface="Calibri" pitchFamily="34" charset="-122"/>
+                    <a:cs typeface="Calibri" pitchFamily="34" charset="-120"/>
+                  </a:rPr>
+                  <a:t>képernyő</a:t>
+                </a:r>
+                <a:r>
+                  <a:rPr lang="en-US" sz="1150" dirty="0">
+                    <a:solidFill>
+                      <a:srgbClr val="C9DADD"/>
+                    </a:solidFill>
+                    <a:latin typeface="Calibri" pitchFamily="34" charset="0"/>
+                    <a:ea typeface="Calibri" pitchFamily="34" charset="-122"/>
+                    <a:cs typeface="Calibri" pitchFamily="34" charset="-120"/>
+                  </a:rPr>
+                  <a:t>, </a:t>
+                </a:r>
+                <a:r>
+                  <a:rPr lang="en-US" sz="1150" dirty="0" err="1">
+                    <a:solidFill>
+                      <a:srgbClr val="C9DADD"/>
+                    </a:solidFill>
+                    <a:latin typeface="Calibri" pitchFamily="34" charset="0"/>
+                    <a:ea typeface="Calibri" pitchFamily="34" charset="-122"/>
+                    <a:cs typeface="Calibri" pitchFamily="34" charset="-120"/>
+                  </a:rPr>
+                  <a:t>demó</a:t>
+                </a:r>
+                <a:r>
+                  <a:rPr lang="en-US" sz="1150" dirty="0">
+                    <a:solidFill>
+                      <a:srgbClr val="C9DADD"/>
+                    </a:solidFill>
+                    <a:latin typeface="Calibri" pitchFamily="34" charset="0"/>
+                    <a:ea typeface="Calibri" pitchFamily="34" charset="-122"/>
+                    <a:cs typeface="Calibri" pitchFamily="34" charset="-120"/>
+                  </a:rPr>
+                  <a:t> </a:t>
+                </a:r>
+                <a:r>
+                  <a:rPr lang="en-US" sz="1150" dirty="0" err="1">
+                    <a:solidFill>
+                      <a:srgbClr val="C9DADD"/>
+                    </a:solidFill>
+                    <a:latin typeface="Calibri" pitchFamily="34" charset="0"/>
+                    <a:ea typeface="Calibri" pitchFamily="34" charset="-122"/>
+                    <a:cs typeface="Calibri" pitchFamily="34" charset="-120"/>
+                  </a:rPr>
+                  <a:t>mód</a:t>
+                </a:r>
+                <a:endParaRPr lang="en-US" sz="1150" dirty="0"/>
+              </a:p>
+            </p:txBody>
+          </p:sp>
+        </p:grpSp>
+        <p:grpSp>
+          <p:nvGrpSpPr>
+            <p:cNvPr id="25" name="Csoportba foglalás 24">
+              <a:extLst>
+                <a:ext uri="{FF2B5EF4-FFF2-40B4-BE49-F238E27FC236}">
+                  <a16:creationId xmlns:a16="http://schemas.microsoft.com/office/drawing/2014/main" id="{45BA6C1D-A58D-281B-1E5B-EF21F2610F4A}"/>
+                </a:ext>
+              </a:extLst>
+            </p:cNvPr>
+            <p:cNvGrpSpPr/>
+            <p:nvPr/>
+          </p:nvGrpSpPr>
+          <p:grpSpPr>
+            <a:xfrm>
+              <a:off x="3264408" y="1051560"/>
+              <a:ext cx="2651760" cy="1463040"/>
+              <a:chOff x="3264408" y="1051560"/>
+              <a:chExt cx="2651760" cy="1463040"/>
+            </a:xfrm>
+          </p:grpSpPr>
+          <p:sp>
+            <p:nvSpPr>
+              <p:cNvPr id="9" name="Shape 7"/>
+              <p:cNvSpPr/>
+              <p:nvPr/>
+            </p:nvSpPr>
+            <p:spPr>
+              <a:xfrm>
+                <a:off x="3264408" y="1051560"/>
+                <a:ext cx="2651760" cy="1463040"/>
+              </a:xfrm>
+              <a:prstGeom prst="roundRect">
+                <a:avLst>
+                  <a:gd name="adj" fmla="val 6250"/>
+                </a:avLst>
+              </a:prstGeom>
+              <a:solidFill>
+                <a:srgbClr val="1F4B53"/>
+              </a:solidFill>
+              <a:ln w="12700">
+                <a:solidFill>
+                  <a:srgbClr val="1F4B53"/>
+                </a:solidFill>
+                <a:prstDash val="solid"/>
+              </a:ln>
+            </p:spPr>
+            <p:txBody>
+              <a:bodyPr/>
+              <a:lstStyle/>
+              <a:p>
+                <a:endParaRPr lang="hu-HU"/>
+              </a:p>
+            </p:txBody>
+          </p:sp>
+          <p:sp>
+            <p:nvSpPr>
+              <p:cNvPr id="10" name="Shape 8"/>
+              <p:cNvSpPr/>
+              <p:nvPr/>
+            </p:nvSpPr>
+            <p:spPr>
+              <a:xfrm>
+                <a:off x="3447288" y="1207008"/>
+                <a:ext cx="457200" cy="457200"/>
+              </a:xfrm>
+              <a:prstGeom prst="ellipse">
+                <a:avLst/>
+              </a:prstGeom>
+              <a:solidFill>
+                <a:srgbClr val="F2A541"/>
+              </a:solidFill>
+              <a:ln w="12700">
+                <a:solidFill>
+                  <a:srgbClr val="F2A541"/>
+                </a:solidFill>
+                <a:prstDash val="solid"/>
+              </a:ln>
+            </p:spPr>
+            <p:txBody>
+              <a:bodyPr/>
+              <a:lstStyle/>
+              <a:p>
+                <a:endParaRPr lang="hu-HU"/>
+              </a:p>
+            </p:txBody>
+          </p:sp>
+          <p:sp>
+            <p:nvSpPr>
+              <p:cNvPr id="11" name="Text 9"/>
+              <p:cNvSpPr txBox="1"/>
+              <p:nvPr/>
+            </p:nvSpPr>
+            <p:spPr>
+              <a:xfrm>
+                <a:off x="3447288" y="1207008"/>
+                <a:ext cx="457200" cy="457200"/>
+              </a:xfrm>
+              <a:prstGeom prst="rect">
+                <a:avLst/>
+              </a:prstGeom>
+              <a:noFill/>
+              <a:ln/>
+            </p:spPr>
+            <p:txBody>
+              <a:bodyPr wrap="square" lIns="0" tIns="0" rIns="0" bIns="0" rtlCol="0" anchor="ctr"/>
+              <a:lstStyle/>
+              <a:p>
+                <a:pPr marL="0" indent="0" algn="ctr">
+                  <a:buNone/>
+                </a:pPr>
+                <a:r>
+                  <a:rPr lang="en-US" sz="1600" b="1" dirty="0">
+                    <a:solidFill>
+                      <a:srgbClr val="12343B"/>
+                    </a:solidFill>
+                    <a:latin typeface="Calibri" pitchFamily="34" charset="0"/>
+                    <a:ea typeface="Calibri" pitchFamily="34" charset="-122"/>
+                    <a:cs typeface="Calibri" pitchFamily="34" charset="-120"/>
+                  </a:rPr>
+                  <a:t>B</a:t>
+                </a:r>
+                <a:endParaRPr lang="en-US" sz="1600" dirty="0"/>
+              </a:p>
+            </p:txBody>
+          </p:sp>
+          <p:sp>
+            <p:nvSpPr>
+              <p:cNvPr id="12" name="Text 10"/>
+              <p:cNvSpPr txBox="1"/>
+              <p:nvPr/>
+            </p:nvSpPr>
+            <p:spPr>
+              <a:xfrm>
+                <a:off x="4014216" y="1207008"/>
+                <a:ext cx="1828800" cy="457200"/>
+              </a:xfrm>
+              <a:prstGeom prst="rect">
+                <a:avLst/>
+              </a:prstGeom>
+              <a:noFill/>
+              <a:ln/>
+            </p:spPr>
+            <p:txBody>
+              <a:bodyPr wrap="square" lIns="0" tIns="0" rIns="0" bIns="0" rtlCol="0" anchor="ctr"/>
+              <a:lstStyle/>
+              <a:p>
+                <a:pPr marL="0" indent="0">
+                  <a:buNone/>
+                </a:pPr>
+                <a:r>
+                  <a:rPr lang="en-US" sz="1350" b="1" dirty="0">
+                    <a:solidFill>
+                      <a:srgbClr val="FFFFFF"/>
+                    </a:solidFill>
+                    <a:latin typeface="Calibri" pitchFamily="34" charset="0"/>
+                    <a:ea typeface="Calibri" pitchFamily="34" charset="-122"/>
+                    <a:cs typeface="Calibri" pitchFamily="34" charset="-120"/>
+                  </a:rPr>
+                  <a:t>Szerver és üzleti logika</a:t>
+                </a:r>
+                <a:endParaRPr lang="en-US" sz="1350" dirty="0"/>
+              </a:p>
+            </p:txBody>
+          </p:sp>
+          <p:sp>
+            <p:nvSpPr>
+              <p:cNvPr id="13" name="Text 11"/>
+              <p:cNvSpPr txBox="1"/>
+              <p:nvPr/>
+            </p:nvSpPr>
+            <p:spPr>
+              <a:xfrm>
+                <a:off x="3447288" y="1755648"/>
+                <a:ext cx="2286000" cy="274320"/>
+              </a:xfrm>
+              <a:prstGeom prst="rect">
+                <a:avLst/>
+              </a:prstGeom>
+              <a:noFill/>
+              <a:ln/>
+            </p:spPr>
+            <p:txBody>
+              <a:bodyPr wrap="square" lIns="0" tIns="0" rIns="0" bIns="0" rtlCol="0" anchor="t"/>
+              <a:lstStyle/>
+              <a:p>
+                <a:pPr marL="0" indent="0">
+                  <a:buNone/>
+                </a:pPr>
+                <a:r>
+                  <a:rPr lang="en-US" sz="1300">
+                    <a:solidFill>
+                      <a:srgbClr val="F2A541"/>
+                    </a:solidFill>
+                    <a:latin typeface="Calibri" pitchFamily="34" charset="0"/>
+                    <a:ea typeface="Calibri" pitchFamily="34" charset="-122"/>
+                    <a:cs typeface="Calibri" pitchFamily="34" charset="-120"/>
+                  </a:rPr>
+                  <a:t>Horváth Máté</a:t>
+                </a:r>
+                <a:endParaRPr lang="en-US" sz="1300" dirty="0"/>
+              </a:p>
+            </p:txBody>
+          </p:sp>
+          <p:sp>
+            <p:nvSpPr>
+              <p:cNvPr id="14" name="Text 12"/>
+              <p:cNvSpPr txBox="1"/>
+              <p:nvPr/>
+            </p:nvSpPr>
+            <p:spPr>
+              <a:xfrm>
+                <a:off x="3447288" y="2048256"/>
+                <a:ext cx="2331720" cy="365760"/>
+              </a:xfrm>
+              <a:prstGeom prst="rect">
+                <a:avLst/>
+              </a:prstGeom>
+              <a:noFill/>
+              <a:ln/>
+            </p:spPr>
+            <p:txBody>
+              <a:bodyPr wrap="square" lIns="0" tIns="0" rIns="0" bIns="0" rtlCol="0" anchor="t"/>
+              <a:lstStyle/>
+              <a:p>
+                <a:pPr marL="0" indent="0">
+                  <a:buNone/>
+                </a:pPr>
+                <a:r>
+                  <a:rPr lang="en-US" sz="1150" dirty="0">
+                    <a:solidFill>
+                      <a:srgbClr val="C9DADD"/>
+                    </a:solidFill>
+                    <a:latin typeface="Calibri" pitchFamily="34" charset="0"/>
+                    <a:ea typeface="Calibri" pitchFamily="34" charset="-122"/>
+                    <a:cs typeface="Calibri" pitchFamily="34" charset="-120"/>
+                  </a:rPr>
+                  <a:t>Architektúra, API, leltárlogika</a:t>
+                </a:r>
+                <a:endParaRPr lang="en-US" sz="1150" dirty="0"/>
+              </a:p>
+            </p:txBody>
+          </p:sp>
+        </p:grpSp>
+      </p:grpSp>
+      <p:grpSp>
+        <p:nvGrpSpPr>
+          <p:cNvPr id="24" name="Csoportba foglalás 23">
+            <a:extLst>
+              <a:ext uri="{FF2B5EF4-FFF2-40B4-BE49-F238E27FC236}">
+                <a16:creationId xmlns:a16="http://schemas.microsoft.com/office/drawing/2014/main" id="{338998FE-1C1A-E816-DDA1-1593B0542C03}"/>
+              </a:ext>
+            </a:extLst>
+          </p:cNvPr>
+          <p:cNvGrpSpPr/>
+          <p:nvPr/>
+        </p:nvGrpSpPr>
+        <p:grpSpPr>
+          <a:xfrm>
+            <a:off x="3246120" y="2714293"/>
             <a:ext cx="2651760" cy="1463040"/>
-          </a:xfrm>
-          <a:prstGeom prst="roundRect">
-            <a:avLst>
-              <a:gd name="adj" fmla="val 6250"/>
-            </a:avLst>
-          </a:prstGeom>
-          <a:solidFill>
-            <a:srgbClr val="1F4B53"/>
-          </a:solidFill>
-          <a:ln w="12700">
+            <a:chOff x="6071616" y="1051560"/>
+            <a:chExt cx="2651760" cy="1463040"/>
+          </a:xfrm>
+        </p:grpSpPr>
+        <p:sp>
+          <p:nvSpPr>
+            <p:cNvPr id="15" name="Shape 13"/>
+            <p:cNvSpPr/>
+            <p:nvPr/>
+          </p:nvSpPr>
+          <p:spPr>
+            <a:xfrm>
+              <a:off x="6071616" y="1051560"/>
+              <a:ext cx="2651760" cy="1463040"/>
+            </a:xfrm>
+            <a:prstGeom prst="roundRect">
+              <a:avLst>
+                <a:gd name="adj" fmla="val 6250"/>
+              </a:avLst>
+            </a:prstGeom>
             <a:solidFill>
               <a:srgbClr val="1F4B53"/>
             </a:solidFill>
-            <a:prstDash val="solid"/>
-          </a:ln>
-        </p:spPr>
-      </p:sp>
-      <p:sp>
-        <p:nvSpPr>
-          <p:cNvPr id="4" name="Shape 2"/>
-          <p:cNvSpPr/>
-          <p:nvPr/>
-        </p:nvSpPr>
-        <p:spPr>
-          <a:xfrm>
-            <a:off x="640080" y="1207008"/>
-            <a:ext cx="457200" cy="457200"/>
-          </a:xfrm>
-          <a:prstGeom prst="ellipse">
-            <a:avLst/>
-          </a:prstGeom>
-          <a:solidFill>
-            <a:srgbClr val="F2A541"/>
-          </a:solidFill>
-          <a:ln w="12700">
+            <a:ln w="12700">
+              <a:solidFill>
+                <a:srgbClr val="1F4B53"/>
+              </a:solidFill>
+              <a:prstDash val="solid"/>
+            </a:ln>
+          </p:spPr>
+          <p:txBody>
+            <a:bodyPr/>
+            <a:lstStyle/>
+            <a:p>
+              <a:endParaRPr lang="hu-HU"/>
+            </a:p>
+          </p:txBody>
+        </p:sp>
+        <p:sp>
+          <p:nvSpPr>
+            <p:cNvPr id="16" name="Shape 14"/>
+            <p:cNvSpPr/>
+            <p:nvPr/>
+          </p:nvSpPr>
+          <p:spPr>
+            <a:xfrm>
+              <a:off x="6254496" y="1207008"/>
+              <a:ext cx="457200" cy="457200"/>
+            </a:xfrm>
+            <a:prstGeom prst="ellipse">
+              <a:avLst/>
+            </a:prstGeom>
             <a:solidFill>
               <a:srgbClr val="F2A541"/>
             </a:solidFill>
-            <a:prstDash val="solid"/>
-          </a:ln>
-        </p:spPr>
-      </p:sp>
-      <p:sp>
-        <p:nvSpPr>
-          <p:cNvPr id="5" name="Text 3"/>
-          <p:cNvSpPr txBox="1"/>
-          <p:nvPr/>
-        </p:nvSpPr>
-        <p:spPr>
-          <a:xfrm>
-            <a:off x="640080" y="1207008"/>
-            <a:ext cx="457200" cy="457200"/>
-          </a:xfrm>
-          <a:prstGeom prst="rect">
-            <a:avLst/>
-          </a:prstGeom>
-          <a:noFill/>
-          <a:ln/>
-        </p:spPr>
-        <p:txBody>
-          <a:bodyPr wrap="square" lIns="0" tIns="0" rIns="0" bIns="0" rtlCol="0" anchor="ctr"/>
-          <a:lstStyle/>
-          <a:p>
-            <a:pPr marL="0" indent="0" algn="ctr">
-              <a:buNone/>
-            </a:pPr>
-            <a:r>
-              <a:rPr lang="en-US" sz="1600" b="1" dirty="0">
-                <a:solidFill>
-                  <a:srgbClr val="12343B"/>
-                </a:solidFill>
-                <a:latin typeface="Calibri" pitchFamily="34" charset="0"/>
-                <a:ea typeface="Calibri" pitchFamily="34" charset="-122"/>
-                <a:cs typeface="Calibri" pitchFamily="34" charset="-120"/>
-              </a:rPr>
-              <a:t>A</a:t>
-            </a:r>
-            <a:endParaRPr lang="en-US" sz="1600" dirty="0"/>
-          </a:p>
-        </p:txBody>
-      </p:sp>
-      <p:sp>
-        <p:nvSpPr>
-          <p:cNvPr id="6" name="Text 4"/>
-          <p:cNvSpPr txBox="1"/>
-          <p:nvPr/>
-        </p:nvSpPr>
-        <p:spPr>
-          <a:xfrm>
-            <a:off x="1207008" y="1207008"/>
-            <a:ext cx="1828800" cy="457200"/>
-          </a:xfrm>
-          <a:prstGeom prst="rect">
-            <a:avLst/>
-          </a:prstGeom>
-          <a:noFill/>
-          <a:ln/>
-        </p:spPr>
-        <p:txBody>
-          <a:bodyPr wrap="square" lIns="0" tIns="0" rIns="0" bIns="0" rtlCol="0" anchor="ctr"/>
-          <a:lstStyle/>
-          <a:p>
-            <a:pPr marL="0" indent="0">
-              <a:buNone/>
-            </a:pPr>
-            <a:r>
-              <a:rPr lang="en-US" sz="1350" b="1" dirty="0">
-                <a:solidFill>
-                  <a:srgbClr val="FFFFFF"/>
-                </a:solidFill>
-                <a:latin typeface="Calibri" pitchFamily="34" charset="0"/>
-                <a:ea typeface="Calibri" pitchFamily="34" charset="-122"/>
-                <a:cs typeface="Calibri" pitchFamily="34" charset="-120"/>
-              </a:rPr>
-              <a:t>Kliens és UX</a:t>
-            </a:r>
-            <a:endParaRPr lang="en-US" sz="1350" dirty="0"/>
-          </a:p>
-        </p:txBody>
-      </p:sp>
-      <p:sp>
-        <p:nvSpPr>
-          <p:cNvPr id="7" name="Text 5"/>
-          <p:cNvSpPr txBox="1"/>
-          <p:nvPr/>
-        </p:nvSpPr>
-        <p:spPr>
-          <a:xfrm>
-            <a:off x="640080" y="1755648"/>
-            <a:ext cx="2286000" cy="274320"/>
-          </a:xfrm>
-          <a:prstGeom prst="rect">
-            <a:avLst/>
-          </a:prstGeom>
-          <a:noFill/>
-          <a:ln/>
-        </p:spPr>
-        <p:txBody>
-          <a:bodyPr wrap="square" lIns="0" tIns="0" rIns="0" bIns="0" rtlCol="0" anchor="t"/>
-          <a:lstStyle/>
-          <a:p>
-            <a:pPr marL="0" indent="0">
-              <a:buNone/>
-            </a:pPr>
-            <a:r>
-              <a:rPr lang="en-US" sz="1300" smtClean="0">
-                <a:solidFill>
-                  <a:srgbClr val="F2A541"/>
-                </a:solidFill>
-                <a:latin typeface="Calibri" pitchFamily="34" charset="0"/>
-                <a:ea typeface="Calibri" pitchFamily="34" charset="-122"/>
-                <a:cs typeface="Calibri" pitchFamily="34" charset="-120"/>
-              </a:rPr>
-              <a:t>Bárkányi Máté</a:t>
-            </a:r>
-            <a:endParaRPr lang="en-US" sz="1300" dirty="0"/>
-          </a:p>
-        </p:txBody>
-      </p:sp>
-      <p:sp>
-        <p:nvSpPr>
-          <p:cNvPr id="8" name="Text 6"/>
-          <p:cNvSpPr txBox="1"/>
-          <p:nvPr/>
-        </p:nvSpPr>
-        <p:spPr>
-          <a:xfrm>
-            <a:off x="640080" y="2048256"/>
-            <a:ext cx="2331720" cy="365760"/>
-          </a:xfrm>
-          <a:prstGeom prst="rect">
-            <a:avLst/>
-          </a:prstGeom>
-          <a:noFill/>
-          <a:ln/>
-        </p:spPr>
-        <p:txBody>
-          <a:bodyPr wrap="square" lIns="0" tIns="0" rIns="0" bIns="0" rtlCol="0" anchor="t"/>
-          <a:lstStyle/>
-          <a:p>
-            <a:pPr marL="0" indent="0">
-              <a:buNone/>
-            </a:pPr>
-            <a:r>
-              <a:rPr lang="en-US" sz="1150" dirty="0">
-                <a:solidFill>
-                  <a:srgbClr val="C9DADD"/>
-                </a:solidFill>
-                <a:latin typeface="Calibri" pitchFamily="34" charset="0"/>
-                <a:ea typeface="Calibri" pitchFamily="34" charset="-122"/>
-                <a:cs typeface="Calibri" pitchFamily="34" charset="-120"/>
-              </a:rPr>
-              <a:t>GUI, leltározó képernyő, demó mód</a:t>
-            </a:r>
-            <a:endParaRPr lang="en-US" sz="1150" dirty="0"/>
-          </a:p>
-        </p:txBody>
-      </p:sp>
-      <p:sp>
-        <p:nvSpPr>
-          <p:cNvPr id="9" name="Shape 7"/>
-          <p:cNvSpPr/>
-          <p:nvPr/>
-        </p:nvSpPr>
-        <p:spPr>
-          <a:xfrm>
-            <a:off x="3264408" y="1051560"/>
-            <a:ext cx="2651760" cy="1463040"/>
-          </a:xfrm>
-          <a:prstGeom prst="roundRect">
-            <a:avLst>
-              <a:gd name="adj" fmla="val 6250"/>
-            </a:avLst>
-          </a:prstGeom>
-          <a:solidFill>
-            <a:srgbClr val="1F4B53"/>
-          </a:solidFill>
-          <a:ln w="12700">
-            <a:solidFill>
-              <a:srgbClr val="1F4B53"/>
-            </a:solidFill>
-            <a:prstDash val="solid"/>
-          </a:ln>
-        </p:spPr>
-      </p:sp>
-      <p:sp>
-        <p:nvSpPr>
-          <p:cNvPr id="10" name="Shape 8"/>
-          <p:cNvSpPr/>
-          <p:nvPr/>
-        </p:nvSpPr>
-        <p:spPr>
-          <a:xfrm>
-            <a:off x="3447288" y="1207008"/>
-            <a:ext cx="457200" cy="457200"/>
-          </a:xfrm>
-          <a:prstGeom prst="ellipse">
-            <a:avLst/>
-          </a:prstGeom>
-          <a:solidFill>
-            <a:srgbClr val="F2A541"/>
-          </a:solidFill>
-          <a:ln w="12700">
-            <a:solidFill>
-              <a:srgbClr val="F2A541"/>
-            </a:solidFill>
-            <a:prstDash val="solid"/>
-          </a:ln>
-        </p:spPr>
-      </p:sp>
-      <p:sp>
-        <p:nvSpPr>
-          <p:cNvPr id="11" name="Text 9"/>
-          <p:cNvSpPr txBox="1"/>
-          <p:nvPr/>
-        </p:nvSpPr>
-        <p:spPr>
-          <a:xfrm>
-            <a:off x="3447288" y="1207008"/>
-            <a:ext cx="457200" cy="457200"/>
-          </a:xfrm>
-          <a:prstGeom prst="rect">
-            <a:avLst/>
-          </a:prstGeom>
-          <a:noFill/>
-          <a:ln/>
-        </p:spPr>
-        <p:txBody>
-          <a:bodyPr wrap="square" lIns="0" tIns="0" rIns="0" bIns="0" rtlCol="0" anchor="ctr"/>
-          <a:lstStyle/>
-          <a:p>
-            <a:pPr marL="0" indent="0" algn="ctr">
-              <a:buNone/>
-            </a:pPr>
-            <a:r>
-              <a:rPr lang="en-US" sz="1600" b="1" dirty="0">
-                <a:solidFill>
-                  <a:srgbClr val="12343B"/>
-                </a:solidFill>
-                <a:latin typeface="Calibri" pitchFamily="34" charset="0"/>
-                <a:ea typeface="Calibri" pitchFamily="34" charset="-122"/>
-                <a:cs typeface="Calibri" pitchFamily="34" charset="-120"/>
-              </a:rPr>
-              <a:t>B</a:t>
-            </a:r>
-            <a:endParaRPr lang="en-US" sz="1600" dirty="0"/>
-          </a:p>
-        </p:txBody>
-      </p:sp>
-      <p:sp>
-        <p:nvSpPr>
-          <p:cNvPr id="12" name="Text 10"/>
-          <p:cNvSpPr txBox="1"/>
-          <p:nvPr/>
-        </p:nvSpPr>
-        <p:spPr>
-          <a:xfrm>
-            <a:off x="4014216" y="1207008"/>
-            <a:ext cx="1828800" cy="457200"/>
-          </a:xfrm>
-          <a:prstGeom prst="rect">
-            <a:avLst/>
-          </a:prstGeom>
-          <a:noFill/>
-          <a:ln/>
-        </p:spPr>
-        <p:txBody>
-          <a:bodyPr wrap="square" lIns="0" tIns="0" rIns="0" bIns="0" rtlCol="0" anchor="ctr"/>
-          <a:lstStyle/>
-          <a:p>
-            <a:pPr marL="0" indent="0">
-              <a:buNone/>
-            </a:pPr>
-            <a:r>
-              <a:rPr lang="en-US" sz="1350" b="1" dirty="0">
-                <a:solidFill>
-                  <a:srgbClr val="FFFFFF"/>
-                </a:solidFill>
-                <a:latin typeface="Calibri" pitchFamily="34" charset="0"/>
-                <a:ea typeface="Calibri" pitchFamily="34" charset="-122"/>
-                <a:cs typeface="Calibri" pitchFamily="34" charset="-120"/>
-              </a:rPr>
-              <a:t>Szerver és üzleti logika</a:t>
-            </a:r>
-            <a:endParaRPr lang="en-US" sz="1350" dirty="0"/>
-          </a:p>
-        </p:txBody>
-      </p:sp>
-      <p:sp>
-        <p:nvSpPr>
-          <p:cNvPr id="13" name="Text 11"/>
-          <p:cNvSpPr txBox="1"/>
-          <p:nvPr/>
-        </p:nvSpPr>
-        <p:spPr>
-          <a:xfrm>
-            <a:off x="3447288" y="1755648"/>
-            <a:ext cx="2286000" cy="274320"/>
-          </a:xfrm>
-          <a:prstGeom prst="rect">
-            <a:avLst/>
-          </a:prstGeom>
-          <a:noFill/>
-          <a:ln/>
-        </p:spPr>
-        <p:txBody>
-          <a:bodyPr wrap="square" lIns="0" tIns="0" rIns="0" bIns="0" rtlCol="0" anchor="t"/>
-          <a:lstStyle/>
-          <a:p>
-            <a:pPr marL="0" indent="0">
-              <a:buNone/>
-            </a:pPr>
-            <a:r>
-              <a:rPr lang="en-US" sz="1300" smtClean="0">
-                <a:solidFill>
-                  <a:srgbClr val="F2A541"/>
-                </a:solidFill>
-                <a:latin typeface="Calibri" pitchFamily="34" charset="0"/>
-                <a:ea typeface="Calibri" pitchFamily="34" charset="-122"/>
-                <a:cs typeface="Calibri" pitchFamily="34" charset="-120"/>
-              </a:rPr>
-              <a:t>Horváth Máté</a:t>
-            </a:r>
-            <a:endParaRPr lang="en-US" sz="1300" dirty="0"/>
-          </a:p>
-        </p:txBody>
-      </p:sp>
-      <p:sp>
-        <p:nvSpPr>
-          <p:cNvPr id="14" name="Text 12"/>
-          <p:cNvSpPr txBox="1"/>
-          <p:nvPr/>
-        </p:nvSpPr>
-        <p:spPr>
-          <a:xfrm>
-            <a:off x="3447288" y="2048256"/>
-            <a:ext cx="2331720" cy="365760"/>
-          </a:xfrm>
-          <a:prstGeom prst="rect">
-            <a:avLst/>
-          </a:prstGeom>
-          <a:noFill/>
-          <a:ln/>
-        </p:spPr>
-        <p:txBody>
-          <a:bodyPr wrap="square" lIns="0" tIns="0" rIns="0" bIns="0" rtlCol="0" anchor="t"/>
-          <a:lstStyle/>
-          <a:p>
-            <a:pPr marL="0" indent="0">
-              <a:buNone/>
-            </a:pPr>
-            <a:r>
-              <a:rPr lang="en-US" sz="1150" dirty="0">
-                <a:solidFill>
-                  <a:srgbClr val="C9DADD"/>
-                </a:solidFill>
-                <a:latin typeface="Calibri" pitchFamily="34" charset="0"/>
-                <a:ea typeface="Calibri" pitchFamily="34" charset="-122"/>
-                <a:cs typeface="Calibri" pitchFamily="34" charset="-120"/>
-              </a:rPr>
-              <a:t>Architektúra, API, leltárlogika</a:t>
-            </a:r>
-            <a:endParaRPr lang="en-US" sz="1150" dirty="0"/>
-          </a:p>
-        </p:txBody>
-      </p:sp>
-      <p:sp>
-        <p:nvSpPr>
-          <p:cNvPr id="15" name="Shape 13"/>
-          <p:cNvSpPr/>
-          <p:nvPr/>
-        </p:nvSpPr>
-        <p:spPr>
-          <a:xfrm>
-            <a:off x="6071616" y="1051560"/>
-            <a:ext cx="2651760" cy="1463040"/>
-          </a:xfrm>
-          <a:prstGeom prst="roundRect">
-            <a:avLst>
-              <a:gd name="adj" fmla="val 6250"/>
-            </a:avLst>
-          </a:prstGeom>
-          <a:solidFill>
-            <a:srgbClr val="1F4B53"/>
-          </a:solidFill>
-          <a:ln w="12700">
-            <a:solidFill>
-              <a:srgbClr val="1F4B53"/>
-            </a:solidFill>
-            <a:prstDash val="solid"/>
-          </a:ln>
-        </p:spPr>
-      </p:sp>
-      <p:sp>
-        <p:nvSpPr>
-          <p:cNvPr id="16" name="Shape 14"/>
-          <p:cNvSpPr/>
-          <p:nvPr/>
-        </p:nvSpPr>
-        <p:spPr>
-          <a:xfrm>
-            <a:off x="6254496" y="1207008"/>
-            <a:ext cx="457200" cy="457200"/>
-          </a:xfrm>
-          <a:prstGeom prst="ellipse">
-            <a:avLst/>
-          </a:prstGeom>
-          <a:solidFill>
-            <a:srgbClr val="F2A541"/>
-          </a:solidFill>
-          <a:ln w="12700">
-            <a:solidFill>
-              <a:srgbClr val="F2A541"/>
-            </a:solidFill>
-            <a:prstDash val="solid"/>
-          </a:ln>
-        </p:spPr>
-      </p:sp>
-      <p:sp>
-        <p:nvSpPr>
-          <p:cNvPr id="17" name="Text 15"/>
-          <p:cNvSpPr txBox="1"/>
-          <p:nvPr/>
-        </p:nvSpPr>
-        <p:spPr>
-          <a:xfrm>
-            <a:off x="6254496" y="1207008"/>
-            <a:ext cx="457200" cy="457200"/>
-          </a:xfrm>
-          <a:prstGeom prst="rect">
-            <a:avLst/>
-          </a:prstGeom>
-          <a:noFill/>
-          <a:ln/>
-        </p:spPr>
-        <p:txBody>
-          <a:bodyPr wrap="square" lIns="0" tIns="0" rIns="0" bIns="0" rtlCol="0" anchor="ctr"/>
-          <a:lstStyle/>
-          <a:p>
-            <a:pPr marL="0" indent="0" algn="ctr">
-              <a:buNone/>
-            </a:pPr>
-            <a:r>
-              <a:rPr lang="en-US" sz="1600" b="1" dirty="0">
-                <a:solidFill>
-                  <a:srgbClr val="12343B"/>
-                </a:solidFill>
-                <a:latin typeface="Calibri" pitchFamily="34" charset="0"/>
-                <a:ea typeface="Calibri" pitchFamily="34" charset="-122"/>
-                <a:cs typeface="Calibri" pitchFamily="34" charset="-120"/>
-              </a:rPr>
-              <a:t>C</a:t>
-            </a:r>
-            <a:endParaRPr lang="en-US" sz="1600" dirty="0"/>
-          </a:p>
-        </p:txBody>
-      </p:sp>
-      <p:sp>
-        <p:nvSpPr>
-          <p:cNvPr id="18" name="Text 16"/>
-          <p:cNvSpPr txBox="1"/>
-          <p:nvPr/>
-        </p:nvSpPr>
-        <p:spPr>
-          <a:xfrm>
-            <a:off x="6821424" y="1207008"/>
-            <a:ext cx="1828800" cy="457200"/>
-          </a:xfrm>
-          <a:prstGeom prst="rect">
-            <a:avLst/>
-          </a:prstGeom>
-          <a:noFill/>
-          <a:ln/>
-        </p:spPr>
-        <p:txBody>
-          <a:bodyPr wrap="square" lIns="0" tIns="0" rIns="0" bIns="0" rtlCol="0" anchor="ctr"/>
-          <a:lstStyle/>
-          <a:p>
-            <a:pPr marL="0" indent="0">
-              <a:buNone/>
-            </a:pPr>
-            <a:r>
-              <a:rPr lang="en-US" sz="1350" b="1" dirty="0">
-                <a:solidFill>
-                  <a:srgbClr val="FFFFFF"/>
-                </a:solidFill>
-                <a:latin typeface="Calibri" pitchFamily="34" charset="0"/>
-                <a:ea typeface="Calibri" pitchFamily="34" charset="-122"/>
-                <a:cs typeface="Calibri" pitchFamily="34" charset="-120"/>
-              </a:rPr>
-              <a:t>Adat és minőség</a:t>
-            </a:r>
-            <a:endParaRPr lang="en-US" sz="1350" dirty="0"/>
-          </a:p>
-        </p:txBody>
-      </p:sp>
-      <p:sp>
-        <p:nvSpPr>
-          <p:cNvPr id="19" name="Text 17"/>
-          <p:cNvSpPr txBox="1"/>
-          <p:nvPr/>
-        </p:nvSpPr>
-        <p:spPr>
-          <a:xfrm>
-            <a:off x="6254496" y="1755648"/>
-            <a:ext cx="2286000" cy="274320"/>
-          </a:xfrm>
-          <a:prstGeom prst="rect">
-            <a:avLst/>
-          </a:prstGeom>
-          <a:noFill/>
-          <a:ln/>
-        </p:spPr>
-        <p:txBody>
-          <a:bodyPr wrap="square" lIns="0" tIns="0" rIns="0" bIns="0" rtlCol="0" anchor="t"/>
-          <a:lstStyle/>
-          <a:p>
-            <a:pPr marL="0" indent="0">
-              <a:buNone/>
-            </a:pPr>
-            <a:r>
-              <a:rPr lang="en-US" sz="1300" smtClean="0">
-                <a:solidFill>
-                  <a:srgbClr val="F2A541"/>
-                </a:solidFill>
-                <a:latin typeface="Calibri" pitchFamily="34" charset="0"/>
-                <a:ea typeface="Calibri" pitchFamily="34" charset="-122"/>
-                <a:cs typeface="Calibri" pitchFamily="34" charset="-120"/>
-              </a:rPr>
-              <a:t>Kiss Barnabás</a:t>
-            </a:r>
-            <a:endParaRPr lang="en-US" sz="1300" dirty="0"/>
-          </a:p>
-        </p:txBody>
-      </p:sp>
-      <p:sp>
-        <p:nvSpPr>
-          <p:cNvPr id="20" name="Text 18"/>
-          <p:cNvSpPr txBox="1"/>
-          <p:nvPr/>
-        </p:nvSpPr>
-        <p:spPr>
-          <a:xfrm>
-            <a:off x="6254496" y="2048256"/>
-            <a:ext cx="2331720" cy="365760"/>
-          </a:xfrm>
-          <a:prstGeom prst="rect">
-            <a:avLst/>
-          </a:prstGeom>
-          <a:noFill/>
-          <a:ln/>
-        </p:spPr>
-        <p:txBody>
-          <a:bodyPr wrap="square" lIns="0" tIns="0" rIns="0" bIns="0" rtlCol="0" anchor="t"/>
-          <a:lstStyle/>
-          <a:p>
-            <a:pPr marL="0" indent="0">
-              <a:buNone/>
-            </a:pPr>
-            <a:r>
-              <a:rPr lang="en-US" sz="1150" dirty="0">
-                <a:solidFill>
-                  <a:srgbClr val="C9DADD"/>
-                </a:solidFill>
-                <a:latin typeface="Calibri" pitchFamily="34" charset="0"/>
-                <a:ea typeface="Calibri" pitchFamily="34" charset="-122"/>
-                <a:cs typeface="Calibri" pitchFamily="34" charset="-120"/>
-              </a:rPr>
-              <a:t>Adatmodell, import/export, tesztelés</a:t>
-            </a:r>
-            <a:endParaRPr lang="en-US" sz="1150" dirty="0"/>
-          </a:p>
-        </p:txBody>
-      </p:sp>
-      <p:sp>
-        <p:nvSpPr>
-          <p:cNvPr id="21" name="Text 19"/>
-          <p:cNvSpPr txBox="1"/>
-          <p:nvPr/>
-        </p:nvSpPr>
-        <p:spPr>
-          <a:xfrm>
-            <a:off x="457200" y="2788920"/>
-            <a:ext cx="8229600" cy="365760"/>
-          </a:xfrm>
-          <a:prstGeom prst="rect">
-            <a:avLst/>
-          </a:prstGeom>
-          <a:noFill/>
-          <a:ln/>
-        </p:spPr>
-        <p:txBody>
-          <a:bodyPr wrap="square" lIns="0" tIns="0" rIns="0" bIns="0" rtlCol="0" anchor="t"/>
-          <a:lstStyle/>
-          <a:p>
-            <a:pPr marL="0" indent="0">
-              <a:buNone/>
-            </a:pPr>
-            <a:r>
-              <a:rPr lang="en-US" sz="1800" b="1" dirty="0">
-                <a:solidFill>
-                  <a:srgbClr val="F2A541"/>
-                </a:solidFill>
-                <a:latin typeface="Calibri" pitchFamily="34" charset="0"/>
-                <a:ea typeface="Calibri" pitchFamily="34" charset="-122"/>
-                <a:cs typeface="Calibri" pitchFamily="34" charset="-120"/>
-              </a:rPr>
-              <a:t>A 3. alkalomig</a:t>
-            </a:r>
-            <a:endParaRPr lang="en-US" sz="1800" dirty="0"/>
-          </a:p>
-        </p:txBody>
-      </p:sp>
-      <p:sp>
-        <p:nvSpPr>
-          <p:cNvPr id="22" name="Text 20"/>
-          <p:cNvSpPr txBox="1"/>
-          <p:nvPr/>
-        </p:nvSpPr>
-        <p:spPr>
-          <a:xfrm>
-            <a:off x="457200" y="3246120"/>
-            <a:ext cx="3931920" cy="1280160"/>
-          </a:xfrm>
-          <a:prstGeom prst="rect">
-            <a:avLst/>
-          </a:prstGeom>
-          <a:noFill/>
-          <a:ln/>
-        </p:spPr>
-        <p:txBody>
-          <a:bodyPr wrap="square" lIns="0" tIns="0" rIns="0" bIns="0" rtlCol="0" anchor="t"/>
-          <a:lstStyle/>
-          <a:p>
-            <a:pPr marL="203200" indent="-203200">
-              <a:spcAft>
-                <a:spcPts val="800"/>
-              </a:spcAft>
-              <a:buSzPct val="100000"/>
-              <a:buChar char="•"/>
-            </a:pPr>
-            <a:r>
-              <a:rPr lang="en-US" sz="1400" dirty="0">
-                <a:solidFill>
-                  <a:srgbClr val="FFFFFF"/>
-                </a:solidFill>
-                <a:latin typeface="Calibri" pitchFamily="34" charset="0"/>
-                <a:ea typeface="Calibri" pitchFamily="34" charset="-122"/>
-                <a:cs typeface="Calibri" pitchFamily="34" charset="-120"/>
-              </a:rPr>
-              <a:t>WPF + ASP.NET Core jóváhagyása, adatbázis és protokoll</a:t>
-            </a:r>
-            <a:endParaRPr lang="en-US" sz="1400" dirty="0"/>
-          </a:p>
-          <a:p>
-            <a:pPr marL="203200" indent="-203200">
-              <a:spcAft>
-                <a:spcPts val="800"/>
-              </a:spcAft>
-              <a:buSzPct val="100000"/>
-              <a:buChar char="•"/>
-            </a:pPr>
-            <a:r>
-              <a:rPr lang="en-US" sz="1400" dirty="0">
-                <a:solidFill>
-                  <a:srgbClr val="FFFFFF"/>
-                </a:solidFill>
-                <a:latin typeface="Calibri" pitchFamily="34" charset="0"/>
-                <a:ea typeface="Calibri" pitchFamily="34" charset="-122"/>
-                <a:cs typeface="Calibri" pitchFamily="34" charset="-120"/>
-              </a:rPr>
-              <a:t>Architektúra v1 és ER-diagram</a:t>
-            </a:r>
-            <a:endParaRPr lang="en-US" sz="1400" dirty="0"/>
-          </a:p>
-          <a:p>
-            <a:pPr marL="203200" indent="-203200">
-              <a:spcAft>
-                <a:spcPts val="800"/>
-              </a:spcAft>
-              <a:buSzPct val="100000"/>
-              <a:buChar char="•"/>
-            </a:pPr>
-            <a:r>
-              <a:rPr lang="en-US" sz="1400" dirty="0">
-                <a:solidFill>
-                  <a:srgbClr val="FFFFFF"/>
-                </a:solidFill>
-                <a:latin typeface="Calibri" pitchFamily="34" charset="0"/>
-                <a:ea typeface="Calibri" pitchFamily="34" charset="-122"/>
-                <a:cs typeface="Calibri" pitchFamily="34" charset="-120"/>
-              </a:rPr>
-              <a:t>Fő képernyők drótvázai</a:t>
-            </a:r>
-            <a:endParaRPr lang="en-US" sz="1400" dirty="0"/>
-          </a:p>
-        </p:txBody>
-      </p:sp>
-      <p:sp>
-        <p:nvSpPr>
-          <p:cNvPr id="23" name="Text 21"/>
-          <p:cNvSpPr txBox="1"/>
-          <p:nvPr/>
-        </p:nvSpPr>
-        <p:spPr>
-          <a:xfrm>
-            <a:off x="4663440" y="3246120"/>
-            <a:ext cx="3931920" cy="1280160"/>
-          </a:xfrm>
-          <a:prstGeom prst="rect">
-            <a:avLst/>
-          </a:prstGeom>
-          <a:noFill/>
-          <a:ln/>
-        </p:spPr>
-        <p:txBody>
-          <a:bodyPr wrap="square" lIns="0" tIns="0" rIns="0" bIns="0" rtlCol="0" anchor="t"/>
-          <a:lstStyle/>
-          <a:p>
-            <a:pPr marL="203200" indent="-203200">
-              <a:spcAft>
-                <a:spcPts val="800"/>
-              </a:spcAft>
-              <a:buSzPct val="100000"/>
-              <a:buChar char="•"/>
-            </a:pPr>
-            <a:r>
-              <a:rPr lang="en-US" sz="1400" dirty="0">
-                <a:solidFill>
-                  <a:srgbClr val="FFFFFF"/>
-                </a:solidFill>
-                <a:latin typeface="Calibri" pitchFamily="34" charset="0"/>
-                <a:ea typeface="Calibri" pitchFamily="34" charset="-122"/>
-                <a:cs typeface="Calibri" pitchFamily="34" charset="-120"/>
-              </a:rPr>
-              <a:t>Leltározási folyamat és hibás esetek</a:t>
-            </a:r>
-            <a:endParaRPr lang="en-US" sz="1400" dirty="0"/>
-          </a:p>
-          <a:p>
-            <a:pPr marL="203200" indent="-203200">
-              <a:spcAft>
-                <a:spcPts val="800"/>
-              </a:spcAft>
-              <a:buSzPct val="100000"/>
-              <a:buChar char="•"/>
-            </a:pPr>
-            <a:r>
-              <a:rPr lang="en-US" sz="1400" dirty="0">
-                <a:solidFill>
-                  <a:srgbClr val="FFFFFF"/>
-                </a:solidFill>
-                <a:latin typeface="Calibri" pitchFamily="34" charset="0"/>
-                <a:ea typeface="Calibri" pitchFamily="34" charset="-122"/>
-                <a:cs typeface="Calibri" pitchFamily="34" charset="-120"/>
-              </a:rPr>
-              <a:t>Kiegészítő funkció javaslat</a:t>
-            </a:r>
-            <a:endParaRPr lang="en-US" sz="1400" dirty="0"/>
-          </a:p>
-          <a:p>
-            <a:pPr marL="203200" indent="-203200">
-              <a:spcAft>
-                <a:spcPts val="800"/>
-              </a:spcAft>
-              <a:buSzPct val="100000"/>
-              <a:buChar char="•"/>
-            </a:pPr>
-            <a:r>
-              <a:rPr lang="en-US" sz="1400" dirty="0">
-                <a:solidFill>
-                  <a:srgbClr val="FFFFFF"/>
-                </a:solidFill>
-                <a:latin typeface="Calibri" pitchFamily="34" charset="0"/>
-                <a:ea typeface="Calibri" pitchFamily="34" charset="-122"/>
-                <a:cs typeface="Calibri" pitchFamily="34" charset="-120"/>
-              </a:rPr>
-              <a:t>Dokumentáció: 10–15 oldal</a:t>
-            </a:r>
-            <a:endParaRPr lang="en-US" sz="1400" dirty="0"/>
-          </a:p>
-        </p:txBody>
-      </p:sp>
+            <a:ln w="12700">
+              <a:solidFill>
+                <a:srgbClr val="F2A541"/>
+              </a:solidFill>
+              <a:prstDash val="solid"/>
+            </a:ln>
+          </p:spPr>
+          <p:txBody>
+            <a:bodyPr/>
+            <a:lstStyle/>
+            <a:p>
+              <a:endParaRPr lang="hu-HU"/>
+            </a:p>
+          </p:txBody>
+        </p:sp>
+        <p:sp>
+          <p:nvSpPr>
+            <p:cNvPr id="17" name="Text 15"/>
+            <p:cNvSpPr txBox="1"/>
+            <p:nvPr/>
+          </p:nvSpPr>
+          <p:spPr>
+            <a:xfrm>
+              <a:off x="6254496" y="1207008"/>
+              <a:ext cx="457200" cy="457200"/>
+            </a:xfrm>
+            <a:prstGeom prst="rect">
+              <a:avLst/>
+            </a:prstGeom>
+            <a:noFill/>
+            <a:ln/>
+          </p:spPr>
+          <p:txBody>
+            <a:bodyPr wrap="square" lIns="0" tIns="0" rIns="0" bIns="0" rtlCol="0" anchor="ctr"/>
+            <a:lstStyle/>
+            <a:p>
+              <a:pPr marL="0" indent="0" algn="ctr">
+                <a:buNone/>
+              </a:pPr>
+              <a:r>
+                <a:rPr lang="en-US" sz="1600" b="1" dirty="0">
+                  <a:solidFill>
+                    <a:srgbClr val="12343B"/>
+                  </a:solidFill>
+                  <a:latin typeface="Calibri" pitchFamily="34" charset="0"/>
+                  <a:ea typeface="Calibri" pitchFamily="34" charset="-122"/>
+                  <a:cs typeface="Calibri" pitchFamily="34" charset="-120"/>
+                </a:rPr>
+                <a:t>C</a:t>
+              </a:r>
+              <a:endParaRPr lang="en-US" sz="1600" dirty="0"/>
+            </a:p>
+          </p:txBody>
+        </p:sp>
+        <p:sp>
+          <p:nvSpPr>
+            <p:cNvPr id="18" name="Text 16"/>
+            <p:cNvSpPr txBox="1"/>
+            <p:nvPr/>
+          </p:nvSpPr>
+          <p:spPr>
+            <a:xfrm>
+              <a:off x="6821424" y="1207008"/>
+              <a:ext cx="1828800" cy="457200"/>
+            </a:xfrm>
+            <a:prstGeom prst="rect">
+              <a:avLst/>
+            </a:prstGeom>
+            <a:noFill/>
+            <a:ln/>
+          </p:spPr>
+          <p:txBody>
+            <a:bodyPr wrap="square" lIns="0" tIns="0" rIns="0" bIns="0" rtlCol="0" anchor="ctr"/>
+            <a:lstStyle/>
+            <a:p>
+              <a:pPr marL="0" indent="0">
+                <a:buNone/>
+              </a:pPr>
+              <a:r>
+                <a:rPr lang="en-US" sz="1350" b="1" dirty="0">
+                  <a:solidFill>
+                    <a:srgbClr val="FFFFFF"/>
+                  </a:solidFill>
+                  <a:latin typeface="Calibri" pitchFamily="34" charset="0"/>
+                  <a:ea typeface="Calibri" pitchFamily="34" charset="-122"/>
+                  <a:cs typeface="Calibri" pitchFamily="34" charset="-120"/>
+                </a:rPr>
+                <a:t>Adat és minőség</a:t>
+              </a:r>
+              <a:endParaRPr lang="en-US" sz="1350" dirty="0"/>
+            </a:p>
+          </p:txBody>
+        </p:sp>
+        <p:sp>
+          <p:nvSpPr>
+            <p:cNvPr id="19" name="Text 17"/>
+            <p:cNvSpPr txBox="1"/>
+            <p:nvPr/>
+          </p:nvSpPr>
+          <p:spPr>
+            <a:xfrm>
+              <a:off x="6254496" y="1755648"/>
+              <a:ext cx="2286000" cy="274320"/>
+            </a:xfrm>
+            <a:prstGeom prst="rect">
+              <a:avLst/>
+            </a:prstGeom>
+            <a:noFill/>
+            <a:ln/>
+          </p:spPr>
+          <p:txBody>
+            <a:bodyPr wrap="square" lIns="0" tIns="0" rIns="0" bIns="0" rtlCol="0" anchor="t"/>
+            <a:lstStyle/>
+            <a:p>
+              <a:pPr marL="0" indent="0">
+                <a:buNone/>
+              </a:pPr>
+              <a:r>
+                <a:rPr lang="en-US" sz="1300">
+                  <a:solidFill>
+                    <a:srgbClr val="F2A541"/>
+                  </a:solidFill>
+                  <a:latin typeface="Calibri" pitchFamily="34" charset="0"/>
+                  <a:ea typeface="Calibri" pitchFamily="34" charset="-122"/>
+                  <a:cs typeface="Calibri" pitchFamily="34" charset="-120"/>
+                </a:rPr>
+                <a:t>Kiss Barnabás</a:t>
+              </a:r>
+              <a:endParaRPr lang="en-US" sz="1300" dirty="0"/>
+            </a:p>
+          </p:txBody>
+        </p:sp>
+        <p:sp>
+          <p:nvSpPr>
+            <p:cNvPr id="20" name="Text 18"/>
+            <p:cNvSpPr txBox="1"/>
+            <p:nvPr/>
+          </p:nvSpPr>
+          <p:spPr>
+            <a:xfrm>
+              <a:off x="6254496" y="2048256"/>
+              <a:ext cx="2331720" cy="365760"/>
+            </a:xfrm>
+            <a:prstGeom prst="rect">
+              <a:avLst/>
+            </a:prstGeom>
+            <a:noFill/>
+            <a:ln/>
+          </p:spPr>
+          <p:txBody>
+            <a:bodyPr wrap="square" lIns="0" tIns="0" rIns="0" bIns="0" rtlCol="0" anchor="t"/>
+            <a:lstStyle/>
+            <a:p>
+              <a:pPr marL="0" indent="0">
+                <a:buNone/>
+              </a:pPr>
+              <a:r>
+                <a:rPr lang="en-US" sz="1150" dirty="0">
+                  <a:solidFill>
+                    <a:srgbClr val="C9DADD"/>
+                  </a:solidFill>
+                  <a:latin typeface="Calibri" pitchFamily="34" charset="0"/>
+                  <a:ea typeface="Calibri" pitchFamily="34" charset="-122"/>
+                  <a:cs typeface="Calibri" pitchFamily="34" charset="-120"/>
+                </a:rPr>
+                <a:t>Adatmodell, import/export, tesztelés</a:t>
+              </a:r>
+              <a:endParaRPr lang="en-US" sz="1150" dirty="0"/>
+            </a:p>
+          </p:txBody>
+        </p:sp>
+      </p:grpSp>
     </p:spTree>
   </p:cSld>
   <p:clrMapOvr>

--- a/02_alkalom/Prezentacio/2_alkalom_prezentacio.pptx
+++ b/02_alkalom/Prezentacio/2_alkalom_prezentacio.pptx
@@ -4076,6 +4076,57 @@
           </a:p>
         </p:txBody>
       </p:sp>
+      <p:sp>
+        <p:nvSpPr>
+          <p:cNvPr id="5" name="Diaszam"/>
+          <p:cNvSpPr txBox="1"/>
+          <p:nvPr/>
+        </p:nvSpPr>
+        <p:spPr>
+          <a:xfrm>
+            <a:off x="7670800" y="4759452"/>
+            <a:ext cx="1016000" cy="276999"/>
+          </a:xfrm>
+          <a:prstGeom prst="rect">
+            <a:avLst/>
+          </a:prstGeom>
+          <a:noFill/>
+        </p:spPr>
+        <p:txBody>
+          <a:bodyPr vert="horz" wrap="square" lIns="0" tIns="0" rIns="0" bIns="0" rtlCol="0">
+            <a:noAutofit/>
+          </a:bodyPr>
+          <a:lstStyle/>
+          <a:p>
+            <a:pPr algn="r"/>
+            <a:fld id="{0A5FAB98-487F-48CD-ACC1-D6CB708072A3}" type="slidenum">
+              <a:rPr lang="hu-HU" sz="1100" smtClean="0">
+                <a:solidFill>
+                  <a:srgbClr val="C9DADD"/>
+                </a:solidFill>
+                <a:latin typeface="Calibri" panose="020F0502020204030204" pitchFamily="34" charset="0"/>
+              </a:rPr>
+              <a:pPr algn="r"/>
+              <a:t>1</a:t>
+            </a:fld>
+            <a:r>
+              <a:rPr lang="hu-HU" sz="1100" smtClean="0">
+                <a:solidFill>
+                  <a:srgbClr val="C9DADD"/>
+                </a:solidFill>
+                <a:latin typeface="Calibri" panose="020F0502020204030204" pitchFamily="34" charset="0"/>
+              </a:rPr>
+              <a:t> / 8</a:t>
+            </a:r>
+            <a:endParaRPr lang="hu-HU" sz="1100">
+              <a:solidFill>
+                <a:srgbClr val="C9DADD"/>
+              </a:solidFill>
+              <a:latin typeface="Calibri" panose="020F0502020204030204" pitchFamily="34" charset="0"/>
+            </a:endParaRPr>
+          </a:p>
+        </p:txBody>
+      </p:sp>
     </p:spTree>
   </p:cSld>
   <p:clrMapOvr>
@@ -4859,6 +4910,57 @@
           </a:p>
         </p:txBody>
       </p:sp>
+      <p:sp>
+        <p:nvSpPr>
+          <p:cNvPr id="24" name="Diaszam"/>
+          <p:cNvSpPr txBox="1"/>
+          <p:nvPr/>
+        </p:nvSpPr>
+        <p:spPr>
+          <a:xfrm>
+            <a:off x="7670800" y="4759452"/>
+            <a:ext cx="1016000" cy="276999"/>
+          </a:xfrm>
+          <a:prstGeom prst="rect">
+            <a:avLst/>
+          </a:prstGeom>
+          <a:noFill/>
+        </p:spPr>
+        <p:txBody>
+          <a:bodyPr vert="horz" wrap="square" lIns="0" tIns="0" rIns="0" bIns="0" rtlCol="0">
+            <a:noAutofit/>
+          </a:bodyPr>
+          <a:lstStyle/>
+          <a:p>
+            <a:pPr algn="r"/>
+            <a:fld id="{06707D77-1F0F-4298-9FA7-890C7ECCD37D}" type="slidenum">
+              <a:rPr lang="hu-HU" sz="1100" smtClean="0">
+                <a:solidFill>
+                  <a:srgbClr val="5B6B73"/>
+                </a:solidFill>
+                <a:latin typeface="Calibri" panose="020F0502020204030204" pitchFamily="34" charset="0"/>
+              </a:rPr>
+              <a:pPr algn="r"/>
+              <a:t>2</a:t>
+            </a:fld>
+            <a:r>
+              <a:rPr lang="hu-HU" sz="1100" smtClean="0">
+                <a:solidFill>
+                  <a:srgbClr val="5B6B73"/>
+                </a:solidFill>
+                <a:latin typeface="Calibri" panose="020F0502020204030204" pitchFamily="34" charset="0"/>
+              </a:rPr>
+              <a:t> / 8</a:t>
+            </a:r>
+            <a:endParaRPr lang="hu-HU" sz="1100">
+              <a:solidFill>
+                <a:srgbClr val="5B6B73"/>
+              </a:solidFill>
+              <a:latin typeface="Calibri" panose="020F0502020204030204" pitchFamily="34" charset="0"/>
+            </a:endParaRPr>
+          </a:p>
+        </p:txBody>
+      </p:sp>
     </p:spTree>
   </p:cSld>
   <p:clrMapOvr>
@@ -5692,6 +5794,57 @@
           </a:p>
         </p:txBody>
       </p:sp>
+      <p:sp>
+        <p:nvSpPr>
+          <p:cNvPr id="23" name="Diaszam"/>
+          <p:cNvSpPr txBox="1"/>
+          <p:nvPr/>
+        </p:nvSpPr>
+        <p:spPr>
+          <a:xfrm>
+            <a:off x="7670800" y="4759452"/>
+            <a:ext cx="1016000" cy="276999"/>
+          </a:xfrm>
+          <a:prstGeom prst="rect">
+            <a:avLst/>
+          </a:prstGeom>
+          <a:noFill/>
+        </p:spPr>
+        <p:txBody>
+          <a:bodyPr vert="horz" wrap="square" lIns="0" tIns="0" rIns="0" bIns="0" rtlCol="0">
+            <a:noAutofit/>
+          </a:bodyPr>
+          <a:lstStyle/>
+          <a:p>
+            <a:pPr algn="r"/>
+            <a:fld id="{04C929F7-7B52-4611-932A-5676A4714C36}" type="slidenum">
+              <a:rPr lang="hu-HU" sz="1100" smtClean="0">
+                <a:solidFill>
+                  <a:srgbClr val="5B6B73"/>
+                </a:solidFill>
+                <a:latin typeface="Calibri" panose="020F0502020204030204" pitchFamily="34" charset="0"/>
+              </a:rPr>
+              <a:pPr algn="r"/>
+              <a:t>3</a:t>
+            </a:fld>
+            <a:r>
+              <a:rPr lang="hu-HU" sz="1100" smtClean="0">
+                <a:solidFill>
+                  <a:srgbClr val="5B6B73"/>
+                </a:solidFill>
+                <a:latin typeface="Calibri" panose="020F0502020204030204" pitchFamily="34" charset="0"/>
+              </a:rPr>
+              <a:t> / 8</a:t>
+            </a:r>
+            <a:endParaRPr lang="hu-HU" sz="1100">
+              <a:solidFill>
+                <a:srgbClr val="5B6B73"/>
+              </a:solidFill>
+              <a:latin typeface="Calibri" panose="020F0502020204030204" pitchFamily="34" charset="0"/>
+            </a:endParaRPr>
+          </a:p>
+        </p:txBody>
+      </p:sp>
     </p:spTree>
   </p:cSld>
   <p:clrMapOvr>
@@ -7095,6 +7248,57 @@
           </a:p>
         </p:txBody>
       </p:sp>
+      <p:sp>
+        <p:nvSpPr>
+          <p:cNvPr id="39" name="Diaszam"/>
+          <p:cNvSpPr txBox="1"/>
+          <p:nvPr/>
+        </p:nvSpPr>
+        <p:spPr>
+          <a:xfrm>
+            <a:off x="7670800" y="4759452"/>
+            <a:ext cx="1016000" cy="276999"/>
+          </a:xfrm>
+          <a:prstGeom prst="rect">
+            <a:avLst/>
+          </a:prstGeom>
+          <a:noFill/>
+        </p:spPr>
+        <p:txBody>
+          <a:bodyPr vert="horz" wrap="square" lIns="0" tIns="0" rIns="0" bIns="0" rtlCol="0">
+            <a:noAutofit/>
+          </a:bodyPr>
+          <a:lstStyle/>
+          <a:p>
+            <a:pPr algn="r"/>
+            <a:fld id="{C20DD17C-48D1-437C-A078-D1746BA82DC6}" type="slidenum">
+              <a:rPr lang="hu-HU" sz="1100" smtClean="0">
+                <a:solidFill>
+                  <a:srgbClr val="5B6B73"/>
+                </a:solidFill>
+                <a:latin typeface="Calibri" panose="020F0502020204030204" pitchFamily="34" charset="0"/>
+              </a:rPr>
+              <a:pPr algn="r"/>
+              <a:t>4</a:t>
+            </a:fld>
+            <a:r>
+              <a:rPr lang="hu-HU" sz="1100" smtClean="0">
+                <a:solidFill>
+                  <a:srgbClr val="5B6B73"/>
+                </a:solidFill>
+                <a:latin typeface="Calibri" panose="020F0502020204030204" pitchFamily="34" charset="0"/>
+              </a:rPr>
+              <a:t> / 8</a:t>
+            </a:r>
+            <a:endParaRPr lang="hu-HU" sz="1100">
+              <a:solidFill>
+                <a:srgbClr val="5B6B73"/>
+              </a:solidFill>
+              <a:latin typeface="Calibri" panose="020F0502020204030204" pitchFamily="34" charset="0"/>
+            </a:endParaRPr>
+          </a:p>
+        </p:txBody>
+      </p:sp>
     </p:spTree>
   </p:cSld>
   <p:clrMapOvr>
@@ -8410,6 +8614,57 @@
           </a:p>
         </p:txBody>
       </p:sp>
+      <p:sp>
+        <p:nvSpPr>
+          <p:cNvPr id="38" name="Diaszam"/>
+          <p:cNvSpPr txBox="1"/>
+          <p:nvPr/>
+        </p:nvSpPr>
+        <p:spPr>
+          <a:xfrm>
+            <a:off x="7670800" y="4759452"/>
+            <a:ext cx="1016000" cy="276999"/>
+          </a:xfrm>
+          <a:prstGeom prst="rect">
+            <a:avLst/>
+          </a:prstGeom>
+          <a:noFill/>
+        </p:spPr>
+        <p:txBody>
+          <a:bodyPr vert="horz" wrap="square" lIns="0" tIns="0" rIns="0" bIns="0" rtlCol="0">
+            <a:noAutofit/>
+          </a:bodyPr>
+          <a:lstStyle/>
+          <a:p>
+            <a:pPr algn="r"/>
+            <a:fld id="{EC1E9B20-AD8D-4230-BA9A-19A620663DAF}" type="slidenum">
+              <a:rPr lang="hu-HU" sz="1100" smtClean="0">
+                <a:solidFill>
+                  <a:srgbClr val="5B6B73"/>
+                </a:solidFill>
+                <a:latin typeface="Calibri" panose="020F0502020204030204" pitchFamily="34" charset="0"/>
+              </a:rPr>
+              <a:pPr algn="r"/>
+              <a:t>5</a:t>
+            </a:fld>
+            <a:r>
+              <a:rPr lang="hu-HU" sz="1100" smtClean="0">
+                <a:solidFill>
+                  <a:srgbClr val="5B6B73"/>
+                </a:solidFill>
+                <a:latin typeface="Calibri" panose="020F0502020204030204" pitchFamily="34" charset="0"/>
+              </a:rPr>
+              <a:t> / 8</a:t>
+            </a:r>
+            <a:endParaRPr lang="hu-HU" sz="1100">
+              <a:solidFill>
+                <a:srgbClr val="5B6B73"/>
+              </a:solidFill>
+              <a:latin typeface="Calibri" panose="020F0502020204030204" pitchFamily="34" charset="0"/>
+            </a:endParaRPr>
+          </a:p>
+        </p:txBody>
+      </p:sp>
     </p:spTree>
   </p:cSld>
   <p:clrMapOvr>
@@ -9414,6 +9669,57 @@
           </a:p>
         </p:txBody>
       </p:sp>
+      <p:sp>
+        <p:nvSpPr>
+          <p:cNvPr id="19" name="Diaszam"/>
+          <p:cNvSpPr txBox="1"/>
+          <p:nvPr/>
+        </p:nvSpPr>
+        <p:spPr>
+          <a:xfrm>
+            <a:off x="7670800" y="4759452"/>
+            <a:ext cx="1016000" cy="276999"/>
+          </a:xfrm>
+          <a:prstGeom prst="rect">
+            <a:avLst/>
+          </a:prstGeom>
+          <a:noFill/>
+        </p:spPr>
+        <p:txBody>
+          <a:bodyPr vert="horz" wrap="square" lIns="0" tIns="0" rIns="0" bIns="0" rtlCol="0">
+            <a:noAutofit/>
+          </a:bodyPr>
+          <a:lstStyle/>
+          <a:p>
+            <a:pPr algn="r"/>
+            <a:fld id="{4994DD61-2EAB-4473-9A34-CBE8227D1F11}" type="slidenum">
+              <a:rPr lang="hu-HU" sz="1100" smtClean="0">
+                <a:solidFill>
+                  <a:srgbClr val="5B6B73"/>
+                </a:solidFill>
+                <a:latin typeface="Calibri" panose="020F0502020204030204" pitchFamily="34" charset="0"/>
+              </a:rPr>
+              <a:pPr algn="r"/>
+              <a:t>6</a:t>
+            </a:fld>
+            <a:r>
+              <a:rPr lang="hu-HU" sz="1100" smtClean="0">
+                <a:solidFill>
+                  <a:srgbClr val="5B6B73"/>
+                </a:solidFill>
+                <a:latin typeface="Calibri" panose="020F0502020204030204" pitchFamily="34" charset="0"/>
+              </a:rPr>
+              <a:t> / 8</a:t>
+            </a:r>
+            <a:endParaRPr lang="hu-HU" sz="1100">
+              <a:solidFill>
+                <a:srgbClr val="5B6B73"/>
+              </a:solidFill>
+              <a:latin typeface="Calibri" panose="020F0502020204030204" pitchFamily="34" charset="0"/>
+            </a:endParaRPr>
+          </a:p>
+        </p:txBody>
+      </p:sp>
     </p:spTree>
   </p:cSld>
   <p:clrMapOvr>
@@ -10705,6 +11011,57 @@
               <a:t>  ·  adatbázis és kommunikációs protokoll: döntés a 3. alkalomig</a:t>
             </a:r>
             <a:endParaRPr lang="en-US" sz="1150" dirty="0"/>
+          </a:p>
+        </p:txBody>
+      </p:sp>
+      <p:sp>
+        <p:nvSpPr>
+          <p:cNvPr id="36" name="Diaszam"/>
+          <p:cNvSpPr txBox="1"/>
+          <p:nvPr/>
+        </p:nvSpPr>
+        <p:spPr>
+          <a:xfrm>
+            <a:off x="7670800" y="4759452"/>
+            <a:ext cx="1016000" cy="276999"/>
+          </a:xfrm>
+          <a:prstGeom prst="rect">
+            <a:avLst/>
+          </a:prstGeom>
+          <a:noFill/>
+        </p:spPr>
+        <p:txBody>
+          <a:bodyPr vert="horz" wrap="square" lIns="0" tIns="0" rIns="0" bIns="0" rtlCol="0">
+            <a:noAutofit/>
+          </a:bodyPr>
+          <a:lstStyle/>
+          <a:p>
+            <a:pPr algn="r"/>
+            <a:fld id="{F464BC06-61D9-4571-A63C-9705F968ACC8}" type="slidenum">
+              <a:rPr lang="hu-HU" sz="1100" smtClean="0">
+                <a:solidFill>
+                  <a:srgbClr val="5B6B73"/>
+                </a:solidFill>
+                <a:latin typeface="Calibri" panose="020F0502020204030204" pitchFamily="34" charset="0"/>
+              </a:rPr>
+              <a:pPr algn="r"/>
+              <a:t>7</a:t>
+            </a:fld>
+            <a:r>
+              <a:rPr lang="hu-HU" sz="1100" smtClean="0">
+                <a:solidFill>
+                  <a:srgbClr val="5B6B73"/>
+                </a:solidFill>
+                <a:latin typeface="Calibri" panose="020F0502020204030204" pitchFamily="34" charset="0"/>
+              </a:rPr>
+              <a:t> / 8</a:t>
+            </a:r>
+            <a:endParaRPr lang="hu-HU" sz="1100">
+              <a:solidFill>
+                <a:srgbClr val="5B6B73"/>
+              </a:solidFill>
+              <a:latin typeface="Calibri" panose="020F0502020204030204" pitchFamily="34" charset="0"/>
+            </a:endParaRPr>
           </a:p>
         </p:txBody>
       </p:sp>
@@ -11618,6 +11975,57 @@
           </p:txBody>
         </p:sp>
       </p:grpSp>
+      <p:sp>
+        <p:nvSpPr>
+          <p:cNvPr id="21" name="Diaszam"/>
+          <p:cNvSpPr txBox="1"/>
+          <p:nvPr/>
+        </p:nvSpPr>
+        <p:spPr>
+          <a:xfrm>
+            <a:off x="7670800" y="4759452"/>
+            <a:ext cx="1016000" cy="276999"/>
+          </a:xfrm>
+          <a:prstGeom prst="rect">
+            <a:avLst/>
+          </a:prstGeom>
+          <a:noFill/>
+        </p:spPr>
+        <p:txBody>
+          <a:bodyPr vert="horz" wrap="square" lIns="0" tIns="0" rIns="0" bIns="0" rtlCol="0">
+            <a:noAutofit/>
+          </a:bodyPr>
+          <a:lstStyle/>
+          <a:p>
+            <a:pPr algn="r"/>
+            <a:fld id="{02C11A0F-8F27-48E7-AD77-FD4F3794AB13}" type="slidenum">
+              <a:rPr lang="hu-HU" sz="1100" smtClean="0">
+                <a:solidFill>
+                  <a:srgbClr val="C9DADD"/>
+                </a:solidFill>
+                <a:latin typeface="Calibri" panose="020F0502020204030204" pitchFamily="34" charset="0"/>
+              </a:rPr>
+              <a:pPr algn="r"/>
+              <a:t>8</a:t>
+            </a:fld>
+            <a:r>
+              <a:rPr lang="hu-HU" sz="1100" smtClean="0">
+                <a:solidFill>
+                  <a:srgbClr val="C9DADD"/>
+                </a:solidFill>
+                <a:latin typeface="Calibri" panose="020F0502020204030204" pitchFamily="34" charset="0"/>
+              </a:rPr>
+              <a:t> / 8</a:t>
+            </a:r>
+            <a:endParaRPr lang="hu-HU" sz="1100">
+              <a:solidFill>
+                <a:srgbClr val="C9DADD"/>
+              </a:solidFill>
+              <a:latin typeface="Calibri" panose="020F0502020204030204" pitchFamily="34" charset="0"/>
+            </a:endParaRPr>
+          </a:p>
+        </p:txBody>
+      </p:sp>
     </p:spTree>
   </p:cSld>
   <p:clrMapOvr>
